--- a/files/ccb.pptx
+++ b/files/ccb.pptx
@@ -1,6 +1,6 @@
 
 <file path=ppt/presentation.xml><?xml version="1.0" encoding="utf-8"?>
-<p:presentation xmlns:a="http://schemas.openxmlformats.org/drawingml/2006/main" xmlns:r="http://schemas.openxmlformats.org/officeDocument/2006/relationships" xmlns:p="http://schemas.openxmlformats.org/presentationml/2006/main" saveSubsetFonts="1" autoCompressPictures="0">
+<p:presentation xmlns:a="http://schemas.openxmlformats.org/drawingml/2006/main" xmlns:r="http://schemas.openxmlformats.org/officeDocument/2006/relationships" xmlns:p="http://schemas.openxmlformats.org/presentationml/2006/main" removePersonalInfoOnSave="1" saveSubsetFonts="1" autoCompressPictures="0">
   <p:sldMasterIdLst>
     <p:sldMasterId id="2147483858" r:id="rId1"/>
   </p:sldMasterIdLst>
@@ -134,6 +134,14 @@
 </p:presentation>
 </file>
 
+<file path=ppt/revisionInfo.xml><?xml version="1.0" encoding="utf-8"?>
+<p1510:revInfo xmlns:a="http://schemas.openxmlformats.org/drawingml/2006/main" xmlns:r="http://schemas.openxmlformats.org/officeDocument/2006/relationships" xmlns:p1510="http://schemas.microsoft.com/office/powerpoint/2015/10/main">
+  <p1510:revLst>
+    <p1510:client id="{29AF2C3B-FCED-49DC-9044-D27F7812587D}" v="259" dt="2023-01-04T13:43:24.997"/>
+  </p1510:revLst>
+</p1510:revInfo>
+</file>
+
 <file path=ppt/notesMasters/notesMaster1.xml><?xml version="1.0" encoding="utf-8"?>
 <p:notesMaster xmlns:a="http://schemas.openxmlformats.org/drawingml/2006/main" xmlns:r="http://schemas.openxmlformats.org/officeDocument/2006/relationships" xmlns:p="http://schemas.openxmlformats.org/presentationml/2006/main">
   <p:cSld>
@@ -216,7 +224,7 @@
           <a:p>
             <a:fld id="{BDA51940-DB52-3B48-AABB-9C7938529E4E}" type="datetimeFigureOut">
               <a:rPr kumimoji="1" lang="zh-CN" altLang="en-US" smtClean="0"/>
-              <a:t>2022/12/25</a:t>
+              <a:t>2023/1/23</a:t>
             </a:fld>
             <a:endParaRPr kumimoji="1" lang="zh-CN" altLang="en-US"/>
           </a:p>
@@ -481,6 +489,1686 @@
     </a:lvl9pPr>
   </p:notesStyle>
 </p:notesMaster>
+</file>
+
+<file path=ppt/notesSlides/notesSlide1.xml><?xml version="1.0" encoding="utf-8"?>
+<p:notes xmlns:a="http://schemas.openxmlformats.org/drawingml/2006/main" xmlns:r="http://schemas.openxmlformats.org/officeDocument/2006/relationships" xmlns:p="http://schemas.openxmlformats.org/presentationml/2006/main">
+  <p:cSld>
+    <p:spTree>
+      <p:nvGrpSpPr>
+        <p:cNvPr id="1" name=""/>
+        <p:cNvGrpSpPr/>
+        <p:nvPr/>
+      </p:nvGrpSpPr>
+      <p:grpSpPr>
+        <a:xfrm>
+          <a:off x="0" y="0"/>
+          <a:ext cx="0" cy="0"/>
+          <a:chOff x="0" y="0"/>
+          <a:chExt cx="0" cy="0"/>
+        </a:xfrm>
+      </p:grpSpPr>
+      <p:sp>
+        <p:nvSpPr>
+          <p:cNvPr id="2" name="Slide Image Placeholder 1"/>
+          <p:cNvSpPr>
+            <a:spLocks noGrp="1" noRot="1" noChangeAspect="1"/>
+          </p:cNvSpPr>
+          <p:nvPr>
+            <p:ph type="sldImg"/>
+          </p:nvPr>
+        </p:nvSpPr>
+        <p:spPr/>
+      </p:sp>
+      <p:sp>
+        <p:nvSpPr>
+          <p:cNvPr id="3" name="Notes Placeholder 2"/>
+          <p:cNvSpPr>
+            <a:spLocks noGrp="1"/>
+          </p:cNvSpPr>
+          <p:nvPr>
+            <p:ph type="body" idx="1"/>
+          </p:nvPr>
+        </p:nvSpPr>
+        <p:spPr/>
+        <p:txBody>
+          <a:bodyPr/>
+          <a:lstStyle/>
+          <a:p>
+            <a:endParaRPr lang="zh-CN" altLang="en-US" dirty="0"/>
+          </a:p>
+        </p:txBody>
+      </p:sp>
+      <p:sp>
+        <p:nvSpPr>
+          <p:cNvPr id="4" name="Slide Number Placeholder 3"/>
+          <p:cNvSpPr>
+            <a:spLocks noGrp="1"/>
+          </p:cNvSpPr>
+          <p:nvPr>
+            <p:ph type="sldNum" sz="quarter" idx="5"/>
+          </p:nvPr>
+        </p:nvSpPr>
+        <p:spPr/>
+        <p:txBody>
+          <a:bodyPr/>
+          <a:lstStyle/>
+          <a:p>
+            <a:fld id="{6D18717E-F74C-4246-A795-6577BEDC8382}" type="slidenum">
+              <a:rPr kumimoji="1" lang="zh-CN" altLang="en-US" smtClean="0"/>
+              <a:t>1</a:t>
+            </a:fld>
+            <a:endParaRPr kumimoji="1" lang="zh-CN" altLang="en-US"/>
+          </a:p>
+        </p:txBody>
+      </p:sp>
+    </p:spTree>
+    <p:extLst>
+      <p:ext uri="{BB962C8B-B14F-4D97-AF65-F5344CB8AC3E}">
+        <p14:creationId xmlns:p14="http://schemas.microsoft.com/office/powerpoint/2010/main" val="3375037581"/>
+      </p:ext>
+    </p:extLst>
+  </p:cSld>
+  <p:clrMapOvr>
+    <a:masterClrMapping/>
+  </p:clrMapOvr>
+</p:notes>
+</file>
+
+<file path=ppt/notesSlides/notesSlide10.xml><?xml version="1.0" encoding="utf-8"?>
+<p:notes xmlns:a="http://schemas.openxmlformats.org/drawingml/2006/main" xmlns:r="http://schemas.openxmlformats.org/officeDocument/2006/relationships" xmlns:p="http://schemas.openxmlformats.org/presentationml/2006/main">
+  <p:cSld>
+    <p:spTree>
+      <p:nvGrpSpPr>
+        <p:cNvPr id="1" name=""/>
+        <p:cNvGrpSpPr/>
+        <p:nvPr/>
+      </p:nvGrpSpPr>
+      <p:grpSpPr>
+        <a:xfrm>
+          <a:off x="0" y="0"/>
+          <a:ext cx="0" cy="0"/>
+          <a:chOff x="0" y="0"/>
+          <a:chExt cx="0" cy="0"/>
+        </a:xfrm>
+      </p:grpSpPr>
+      <p:sp>
+        <p:nvSpPr>
+          <p:cNvPr id="2" name="Slide Image Placeholder 1"/>
+          <p:cNvSpPr>
+            <a:spLocks noGrp="1" noRot="1" noChangeAspect="1"/>
+          </p:cNvSpPr>
+          <p:nvPr>
+            <p:ph type="sldImg"/>
+          </p:nvPr>
+        </p:nvSpPr>
+        <p:spPr/>
+      </p:sp>
+      <p:sp>
+        <p:nvSpPr>
+          <p:cNvPr id="3" name="Notes Placeholder 2"/>
+          <p:cNvSpPr>
+            <a:spLocks noGrp="1"/>
+          </p:cNvSpPr>
+          <p:nvPr>
+            <p:ph type="body" idx="1"/>
+          </p:nvPr>
+        </p:nvSpPr>
+        <p:spPr/>
+        <p:txBody>
+          <a:bodyPr/>
+          <a:lstStyle/>
+          <a:p>
+            <a:endParaRPr lang="zh-CN" altLang="en-US" dirty="0"/>
+          </a:p>
+        </p:txBody>
+      </p:sp>
+      <p:sp>
+        <p:nvSpPr>
+          <p:cNvPr id="4" name="Slide Number Placeholder 3"/>
+          <p:cNvSpPr>
+            <a:spLocks noGrp="1"/>
+          </p:cNvSpPr>
+          <p:nvPr>
+            <p:ph type="sldNum" sz="quarter" idx="5"/>
+          </p:nvPr>
+        </p:nvSpPr>
+        <p:spPr/>
+        <p:txBody>
+          <a:bodyPr/>
+          <a:lstStyle/>
+          <a:p>
+            <a:fld id="{6D18717E-F74C-4246-A795-6577BEDC8382}" type="slidenum">
+              <a:rPr kumimoji="1" lang="zh-CN" altLang="en-US" smtClean="0"/>
+              <a:t>10</a:t>
+            </a:fld>
+            <a:endParaRPr kumimoji="1" lang="zh-CN" altLang="en-US"/>
+          </a:p>
+        </p:txBody>
+      </p:sp>
+    </p:spTree>
+    <p:extLst>
+      <p:ext uri="{BB962C8B-B14F-4D97-AF65-F5344CB8AC3E}">
+        <p14:creationId xmlns:p14="http://schemas.microsoft.com/office/powerpoint/2010/main" val="238465597"/>
+      </p:ext>
+    </p:extLst>
+  </p:cSld>
+  <p:clrMapOvr>
+    <a:masterClrMapping/>
+  </p:clrMapOvr>
+</p:notes>
+</file>
+
+<file path=ppt/notesSlides/notesSlide11.xml><?xml version="1.0" encoding="utf-8"?>
+<p:notes xmlns:a="http://schemas.openxmlformats.org/drawingml/2006/main" xmlns:r="http://schemas.openxmlformats.org/officeDocument/2006/relationships" xmlns:p="http://schemas.openxmlformats.org/presentationml/2006/main">
+  <p:cSld>
+    <p:spTree>
+      <p:nvGrpSpPr>
+        <p:cNvPr id="1" name=""/>
+        <p:cNvGrpSpPr/>
+        <p:nvPr/>
+      </p:nvGrpSpPr>
+      <p:grpSpPr>
+        <a:xfrm>
+          <a:off x="0" y="0"/>
+          <a:ext cx="0" cy="0"/>
+          <a:chOff x="0" y="0"/>
+          <a:chExt cx="0" cy="0"/>
+        </a:xfrm>
+      </p:grpSpPr>
+      <p:sp>
+        <p:nvSpPr>
+          <p:cNvPr id="2" name="Slide Image Placeholder 1"/>
+          <p:cNvSpPr>
+            <a:spLocks noGrp="1" noRot="1" noChangeAspect="1"/>
+          </p:cNvSpPr>
+          <p:nvPr>
+            <p:ph type="sldImg"/>
+          </p:nvPr>
+        </p:nvSpPr>
+        <p:spPr/>
+      </p:sp>
+      <p:sp>
+        <p:nvSpPr>
+          <p:cNvPr id="3" name="Notes Placeholder 2"/>
+          <p:cNvSpPr>
+            <a:spLocks noGrp="1"/>
+          </p:cNvSpPr>
+          <p:nvPr>
+            <p:ph type="body" idx="1"/>
+          </p:nvPr>
+        </p:nvSpPr>
+        <p:spPr/>
+        <p:txBody>
+          <a:bodyPr/>
+          <a:lstStyle/>
+          <a:p>
+            <a:endParaRPr lang="zh-CN" altLang="en-US" dirty="0"/>
+          </a:p>
+        </p:txBody>
+      </p:sp>
+      <p:sp>
+        <p:nvSpPr>
+          <p:cNvPr id="4" name="Slide Number Placeholder 3"/>
+          <p:cNvSpPr>
+            <a:spLocks noGrp="1"/>
+          </p:cNvSpPr>
+          <p:nvPr>
+            <p:ph type="sldNum" sz="quarter" idx="5"/>
+          </p:nvPr>
+        </p:nvSpPr>
+        <p:spPr/>
+        <p:txBody>
+          <a:bodyPr/>
+          <a:lstStyle/>
+          <a:p>
+            <a:fld id="{6D18717E-F74C-4246-A795-6577BEDC8382}" type="slidenum">
+              <a:rPr kumimoji="1" lang="zh-CN" altLang="en-US" smtClean="0"/>
+              <a:t>11</a:t>
+            </a:fld>
+            <a:endParaRPr kumimoji="1" lang="zh-CN" altLang="en-US"/>
+          </a:p>
+        </p:txBody>
+      </p:sp>
+    </p:spTree>
+    <p:extLst>
+      <p:ext uri="{BB962C8B-B14F-4D97-AF65-F5344CB8AC3E}">
+        <p14:creationId xmlns:p14="http://schemas.microsoft.com/office/powerpoint/2010/main" val="3322056765"/>
+      </p:ext>
+    </p:extLst>
+  </p:cSld>
+  <p:clrMapOvr>
+    <a:masterClrMapping/>
+  </p:clrMapOvr>
+</p:notes>
+</file>
+
+<file path=ppt/notesSlides/notesSlide12.xml><?xml version="1.0" encoding="utf-8"?>
+<p:notes xmlns:a="http://schemas.openxmlformats.org/drawingml/2006/main" xmlns:r="http://schemas.openxmlformats.org/officeDocument/2006/relationships" xmlns:p="http://schemas.openxmlformats.org/presentationml/2006/main">
+  <p:cSld>
+    <p:spTree>
+      <p:nvGrpSpPr>
+        <p:cNvPr id="1" name=""/>
+        <p:cNvGrpSpPr/>
+        <p:nvPr/>
+      </p:nvGrpSpPr>
+      <p:grpSpPr>
+        <a:xfrm>
+          <a:off x="0" y="0"/>
+          <a:ext cx="0" cy="0"/>
+          <a:chOff x="0" y="0"/>
+          <a:chExt cx="0" cy="0"/>
+        </a:xfrm>
+      </p:grpSpPr>
+      <p:sp>
+        <p:nvSpPr>
+          <p:cNvPr id="2" name="Slide Image Placeholder 1"/>
+          <p:cNvSpPr>
+            <a:spLocks noGrp="1" noRot="1" noChangeAspect="1"/>
+          </p:cNvSpPr>
+          <p:nvPr>
+            <p:ph type="sldImg"/>
+          </p:nvPr>
+        </p:nvSpPr>
+        <p:spPr/>
+      </p:sp>
+      <p:sp>
+        <p:nvSpPr>
+          <p:cNvPr id="3" name="Notes Placeholder 2"/>
+          <p:cNvSpPr>
+            <a:spLocks noGrp="1"/>
+          </p:cNvSpPr>
+          <p:nvPr>
+            <p:ph type="body" idx="1"/>
+          </p:nvPr>
+        </p:nvSpPr>
+        <p:spPr/>
+        <p:txBody>
+          <a:bodyPr/>
+          <a:lstStyle/>
+          <a:p>
+            <a:endParaRPr lang="zh-CN" altLang="en-US" dirty="0"/>
+          </a:p>
+        </p:txBody>
+      </p:sp>
+      <p:sp>
+        <p:nvSpPr>
+          <p:cNvPr id="4" name="Slide Number Placeholder 3"/>
+          <p:cNvSpPr>
+            <a:spLocks noGrp="1"/>
+          </p:cNvSpPr>
+          <p:nvPr>
+            <p:ph type="sldNum" sz="quarter" idx="5"/>
+          </p:nvPr>
+        </p:nvSpPr>
+        <p:spPr/>
+        <p:txBody>
+          <a:bodyPr/>
+          <a:lstStyle/>
+          <a:p>
+            <a:fld id="{6D18717E-F74C-4246-A795-6577BEDC8382}" type="slidenum">
+              <a:rPr kumimoji="1" lang="zh-CN" altLang="en-US" smtClean="0"/>
+              <a:t>12</a:t>
+            </a:fld>
+            <a:endParaRPr kumimoji="1" lang="zh-CN" altLang="en-US"/>
+          </a:p>
+        </p:txBody>
+      </p:sp>
+    </p:spTree>
+    <p:extLst>
+      <p:ext uri="{BB962C8B-B14F-4D97-AF65-F5344CB8AC3E}">
+        <p14:creationId xmlns:p14="http://schemas.microsoft.com/office/powerpoint/2010/main" val="611974968"/>
+      </p:ext>
+    </p:extLst>
+  </p:cSld>
+  <p:clrMapOvr>
+    <a:masterClrMapping/>
+  </p:clrMapOvr>
+</p:notes>
+</file>
+
+<file path=ppt/notesSlides/notesSlide13.xml><?xml version="1.0" encoding="utf-8"?>
+<p:notes xmlns:a="http://schemas.openxmlformats.org/drawingml/2006/main" xmlns:r="http://schemas.openxmlformats.org/officeDocument/2006/relationships" xmlns:p="http://schemas.openxmlformats.org/presentationml/2006/main">
+  <p:cSld>
+    <p:spTree>
+      <p:nvGrpSpPr>
+        <p:cNvPr id="1" name=""/>
+        <p:cNvGrpSpPr/>
+        <p:nvPr/>
+      </p:nvGrpSpPr>
+      <p:grpSpPr>
+        <a:xfrm>
+          <a:off x="0" y="0"/>
+          <a:ext cx="0" cy="0"/>
+          <a:chOff x="0" y="0"/>
+          <a:chExt cx="0" cy="0"/>
+        </a:xfrm>
+      </p:grpSpPr>
+      <p:sp>
+        <p:nvSpPr>
+          <p:cNvPr id="2" name="Slide Image Placeholder 1"/>
+          <p:cNvSpPr>
+            <a:spLocks noGrp="1" noRot="1" noChangeAspect="1"/>
+          </p:cNvSpPr>
+          <p:nvPr>
+            <p:ph type="sldImg"/>
+          </p:nvPr>
+        </p:nvSpPr>
+        <p:spPr/>
+      </p:sp>
+      <p:sp>
+        <p:nvSpPr>
+          <p:cNvPr id="3" name="Notes Placeholder 2"/>
+          <p:cNvSpPr>
+            <a:spLocks noGrp="1"/>
+          </p:cNvSpPr>
+          <p:nvPr>
+            <p:ph type="body" idx="1"/>
+          </p:nvPr>
+        </p:nvSpPr>
+        <p:spPr/>
+        <p:txBody>
+          <a:bodyPr/>
+          <a:lstStyle/>
+          <a:p>
+            <a:endParaRPr lang="zh-CN" altLang="en-US" dirty="0"/>
+          </a:p>
+        </p:txBody>
+      </p:sp>
+      <p:sp>
+        <p:nvSpPr>
+          <p:cNvPr id="4" name="Slide Number Placeholder 3"/>
+          <p:cNvSpPr>
+            <a:spLocks noGrp="1"/>
+          </p:cNvSpPr>
+          <p:nvPr>
+            <p:ph type="sldNum" sz="quarter" idx="5"/>
+          </p:nvPr>
+        </p:nvSpPr>
+        <p:spPr/>
+        <p:txBody>
+          <a:bodyPr/>
+          <a:lstStyle/>
+          <a:p>
+            <a:fld id="{6D18717E-F74C-4246-A795-6577BEDC8382}" type="slidenum">
+              <a:rPr kumimoji="1" lang="zh-CN" altLang="en-US" smtClean="0"/>
+              <a:t>13</a:t>
+            </a:fld>
+            <a:endParaRPr kumimoji="1" lang="zh-CN" altLang="en-US"/>
+          </a:p>
+        </p:txBody>
+      </p:sp>
+    </p:spTree>
+    <p:extLst>
+      <p:ext uri="{BB962C8B-B14F-4D97-AF65-F5344CB8AC3E}">
+        <p14:creationId xmlns:p14="http://schemas.microsoft.com/office/powerpoint/2010/main" val="1916683450"/>
+      </p:ext>
+    </p:extLst>
+  </p:cSld>
+  <p:clrMapOvr>
+    <a:masterClrMapping/>
+  </p:clrMapOvr>
+</p:notes>
+</file>
+
+<file path=ppt/notesSlides/notesSlide14.xml><?xml version="1.0" encoding="utf-8"?>
+<p:notes xmlns:a="http://schemas.openxmlformats.org/drawingml/2006/main" xmlns:r="http://schemas.openxmlformats.org/officeDocument/2006/relationships" xmlns:p="http://schemas.openxmlformats.org/presentationml/2006/main">
+  <p:cSld>
+    <p:spTree>
+      <p:nvGrpSpPr>
+        <p:cNvPr id="1" name=""/>
+        <p:cNvGrpSpPr/>
+        <p:nvPr/>
+      </p:nvGrpSpPr>
+      <p:grpSpPr>
+        <a:xfrm>
+          <a:off x="0" y="0"/>
+          <a:ext cx="0" cy="0"/>
+          <a:chOff x="0" y="0"/>
+          <a:chExt cx="0" cy="0"/>
+        </a:xfrm>
+      </p:grpSpPr>
+      <p:sp>
+        <p:nvSpPr>
+          <p:cNvPr id="2" name="Slide Image Placeholder 1"/>
+          <p:cNvSpPr>
+            <a:spLocks noGrp="1" noRot="1" noChangeAspect="1"/>
+          </p:cNvSpPr>
+          <p:nvPr>
+            <p:ph type="sldImg"/>
+          </p:nvPr>
+        </p:nvSpPr>
+        <p:spPr/>
+      </p:sp>
+      <p:sp>
+        <p:nvSpPr>
+          <p:cNvPr id="3" name="Notes Placeholder 2"/>
+          <p:cNvSpPr>
+            <a:spLocks noGrp="1"/>
+          </p:cNvSpPr>
+          <p:nvPr>
+            <p:ph type="body" idx="1"/>
+          </p:nvPr>
+        </p:nvSpPr>
+        <p:spPr/>
+        <p:txBody>
+          <a:bodyPr/>
+          <a:lstStyle/>
+          <a:p>
+            <a:endParaRPr lang="zh-CN" altLang="en-US" dirty="0"/>
+          </a:p>
+        </p:txBody>
+      </p:sp>
+      <p:sp>
+        <p:nvSpPr>
+          <p:cNvPr id="4" name="Slide Number Placeholder 3"/>
+          <p:cNvSpPr>
+            <a:spLocks noGrp="1"/>
+          </p:cNvSpPr>
+          <p:nvPr>
+            <p:ph type="sldNum" sz="quarter" idx="5"/>
+          </p:nvPr>
+        </p:nvSpPr>
+        <p:spPr/>
+        <p:txBody>
+          <a:bodyPr/>
+          <a:lstStyle/>
+          <a:p>
+            <a:fld id="{6D18717E-F74C-4246-A795-6577BEDC8382}" type="slidenum">
+              <a:rPr kumimoji="1" lang="zh-CN" altLang="en-US" smtClean="0"/>
+              <a:t>14</a:t>
+            </a:fld>
+            <a:endParaRPr kumimoji="1" lang="zh-CN" altLang="en-US"/>
+          </a:p>
+        </p:txBody>
+      </p:sp>
+    </p:spTree>
+    <p:extLst>
+      <p:ext uri="{BB962C8B-B14F-4D97-AF65-F5344CB8AC3E}">
+        <p14:creationId xmlns:p14="http://schemas.microsoft.com/office/powerpoint/2010/main" val="3943833817"/>
+      </p:ext>
+    </p:extLst>
+  </p:cSld>
+  <p:clrMapOvr>
+    <a:masterClrMapping/>
+  </p:clrMapOvr>
+</p:notes>
+</file>
+
+<file path=ppt/notesSlides/notesSlide15.xml><?xml version="1.0" encoding="utf-8"?>
+<p:notes xmlns:a="http://schemas.openxmlformats.org/drawingml/2006/main" xmlns:r="http://schemas.openxmlformats.org/officeDocument/2006/relationships" xmlns:p="http://schemas.openxmlformats.org/presentationml/2006/main">
+  <p:cSld>
+    <p:spTree>
+      <p:nvGrpSpPr>
+        <p:cNvPr id="1" name=""/>
+        <p:cNvGrpSpPr/>
+        <p:nvPr/>
+      </p:nvGrpSpPr>
+      <p:grpSpPr>
+        <a:xfrm>
+          <a:off x="0" y="0"/>
+          <a:ext cx="0" cy="0"/>
+          <a:chOff x="0" y="0"/>
+          <a:chExt cx="0" cy="0"/>
+        </a:xfrm>
+      </p:grpSpPr>
+      <p:sp>
+        <p:nvSpPr>
+          <p:cNvPr id="2" name="Slide Image Placeholder 1"/>
+          <p:cNvSpPr>
+            <a:spLocks noGrp="1" noRot="1" noChangeAspect="1"/>
+          </p:cNvSpPr>
+          <p:nvPr>
+            <p:ph type="sldImg"/>
+          </p:nvPr>
+        </p:nvSpPr>
+        <p:spPr/>
+      </p:sp>
+      <p:sp>
+        <p:nvSpPr>
+          <p:cNvPr id="3" name="Notes Placeholder 2"/>
+          <p:cNvSpPr>
+            <a:spLocks noGrp="1"/>
+          </p:cNvSpPr>
+          <p:nvPr>
+            <p:ph type="body" idx="1"/>
+          </p:nvPr>
+        </p:nvSpPr>
+        <p:spPr/>
+        <p:txBody>
+          <a:bodyPr/>
+          <a:lstStyle/>
+          <a:p>
+            <a:endParaRPr lang="zh-CN" altLang="en-US" dirty="0"/>
+          </a:p>
+        </p:txBody>
+      </p:sp>
+      <p:sp>
+        <p:nvSpPr>
+          <p:cNvPr id="4" name="Slide Number Placeholder 3"/>
+          <p:cNvSpPr>
+            <a:spLocks noGrp="1"/>
+          </p:cNvSpPr>
+          <p:nvPr>
+            <p:ph type="sldNum" sz="quarter" idx="5"/>
+          </p:nvPr>
+        </p:nvSpPr>
+        <p:spPr/>
+        <p:txBody>
+          <a:bodyPr/>
+          <a:lstStyle/>
+          <a:p>
+            <a:fld id="{6D18717E-F74C-4246-A795-6577BEDC8382}" type="slidenum">
+              <a:rPr kumimoji="1" lang="zh-CN" altLang="en-US" smtClean="0"/>
+              <a:t>15</a:t>
+            </a:fld>
+            <a:endParaRPr kumimoji="1" lang="zh-CN" altLang="en-US"/>
+          </a:p>
+        </p:txBody>
+      </p:sp>
+    </p:spTree>
+    <p:extLst>
+      <p:ext uri="{BB962C8B-B14F-4D97-AF65-F5344CB8AC3E}">
+        <p14:creationId xmlns:p14="http://schemas.microsoft.com/office/powerpoint/2010/main" val="640582540"/>
+      </p:ext>
+    </p:extLst>
+  </p:cSld>
+  <p:clrMapOvr>
+    <a:masterClrMapping/>
+  </p:clrMapOvr>
+</p:notes>
+</file>
+
+<file path=ppt/notesSlides/notesSlide16.xml><?xml version="1.0" encoding="utf-8"?>
+<p:notes xmlns:a="http://schemas.openxmlformats.org/drawingml/2006/main" xmlns:r="http://schemas.openxmlformats.org/officeDocument/2006/relationships" xmlns:p="http://schemas.openxmlformats.org/presentationml/2006/main">
+  <p:cSld>
+    <p:spTree>
+      <p:nvGrpSpPr>
+        <p:cNvPr id="1" name=""/>
+        <p:cNvGrpSpPr/>
+        <p:nvPr/>
+      </p:nvGrpSpPr>
+      <p:grpSpPr>
+        <a:xfrm>
+          <a:off x="0" y="0"/>
+          <a:ext cx="0" cy="0"/>
+          <a:chOff x="0" y="0"/>
+          <a:chExt cx="0" cy="0"/>
+        </a:xfrm>
+      </p:grpSpPr>
+      <p:sp>
+        <p:nvSpPr>
+          <p:cNvPr id="2" name="Slide Image Placeholder 1"/>
+          <p:cNvSpPr>
+            <a:spLocks noGrp="1" noRot="1" noChangeAspect="1"/>
+          </p:cNvSpPr>
+          <p:nvPr>
+            <p:ph type="sldImg"/>
+          </p:nvPr>
+        </p:nvSpPr>
+        <p:spPr/>
+      </p:sp>
+      <p:sp>
+        <p:nvSpPr>
+          <p:cNvPr id="3" name="Notes Placeholder 2"/>
+          <p:cNvSpPr>
+            <a:spLocks noGrp="1"/>
+          </p:cNvSpPr>
+          <p:nvPr>
+            <p:ph type="body" idx="1"/>
+          </p:nvPr>
+        </p:nvSpPr>
+        <p:spPr/>
+        <p:txBody>
+          <a:bodyPr/>
+          <a:lstStyle/>
+          <a:p>
+            <a:endParaRPr lang="zh-CN" altLang="en-US" dirty="0"/>
+          </a:p>
+        </p:txBody>
+      </p:sp>
+      <p:sp>
+        <p:nvSpPr>
+          <p:cNvPr id="4" name="Slide Number Placeholder 3"/>
+          <p:cNvSpPr>
+            <a:spLocks noGrp="1"/>
+          </p:cNvSpPr>
+          <p:nvPr>
+            <p:ph type="sldNum" sz="quarter" idx="5"/>
+          </p:nvPr>
+        </p:nvSpPr>
+        <p:spPr/>
+        <p:txBody>
+          <a:bodyPr/>
+          <a:lstStyle/>
+          <a:p>
+            <a:fld id="{6D18717E-F74C-4246-A795-6577BEDC8382}" type="slidenum">
+              <a:rPr kumimoji="1" lang="zh-CN" altLang="en-US" smtClean="0"/>
+              <a:t>16</a:t>
+            </a:fld>
+            <a:endParaRPr kumimoji="1" lang="zh-CN" altLang="en-US"/>
+          </a:p>
+        </p:txBody>
+      </p:sp>
+    </p:spTree>
+    <p:extLst>
+      <p:ext uri="{BB962C8B-B14F-4D97-AF65-F5344CB8AC3E}">
+        <p14:creationId xmlns:p14="http://schemas.microsoft.com/office/powerpoint/2010/main" val="94258468"/>
+      </p:ext>
+    </p:extLst>
+  </p:cSld>
+  <p:clrMapOvr>
+    <a:masterClrMapping/>
+  </p:clrMapOvr>
+</p:notes>
+</file>
+
+<file path=ppt/notesSlides/notesSlide17.xml><?xml version="1.0" encoding="utf-8"?>
+<p:notes xmlns:a="http://schemas.openxmlformats.org/drawingml/2006/main" xmlns:r="http://schemas.openxmlformats.org/officeDocument/2006/relationships" xmlns:p="http://schemas.openxmlformats.org/presentationml/2006/main">
+  <p:cSld>
+    <p:spTree>
+      <p:nvGrpSpPr>
+        <p:cNvPr id="1" name=""/>
+        <p:cNvGrpSpPr/>
+        <p:nvPr/>
+      </p:nvGrpSpPr>
+      <p:grpSpPr>
+        <a:xfrm>
+          <a:off x="0" y="0"/>
+          <a:ext cx="0" cy="0"/>
+          <a:chOff x="0" y="0"/>
+          <a:chExt cx="0" cy="0"/>
+        </a:xfrm>
+      </p:grpSpPr>
+      <p:sp>
+        <p:nvSpPr>
+          <p:cNvPr id="2" name="Slide Image Placeholder 1"/>
+          <p:cNvSpPr>
+            <a:spLocks noGrp="1" noRot="1" noChangeAspect="1"/>
+          </p:cNvSpPr>
+          <p:nvPr>
+            <p:ph type="sldImg"/>
+          </p:nvPr>
+        </p:nvSpPr>
+        <p:spPr/>
+      </p:sp>
+      <p:sp>
+        <p:nvSpPr>
+          <p:cNvPr id="3" name="Notes Placeholder 2"/>
+          <p:cNvSpPr>
+            <a:spLocks noGrp="1"/>
+          </p:cNvSpPr>
+          <p:nvPr>
+            <p:ph type="body" idx="1"/>
+          </p:nvPr>
+        </p:nvSpPr>
+        <p:spPr/>
+        <p:txBody>
+          <a:bodyPr/>
+          <a:lstStyle/>
+          <a:p>
+            <a:endParaRPr lang="zh-CN" altLang="en-US" dirty="0"/>
+          </a:p>
+        </p:txBody>
+      </p:sp>
+      <p:sp>
+        <p:nvSpPr>
+          <p:cNvPr id="4" name="Slide Number Placeholder 3"/>
+          <p:cNvSpPr>
+            <a:spLocks noGrp="1"/>
+          </p:cNvSpPr>
+          <p:nvPr>
+            <p:ph type="sldNum" sz="quarter" idx="5"/>
+          </p:nvPr>
+        </p:nvSpPr>
+        <p:spPr/>
+        <p:txBody>
+          <a:bodyPr/>
+          <a:lstStyle/>
+          <a:p>
+            <a:fld id="{6D18717E-F74C-4246-A795-6577BEDC8382}" type="slidenum">
+              <a:rPr kumimoji="1" lang="zh-CN" altLang="en-US" smtClean="0"/>
+              <a:t>17</a:t>
+            </a:fld>
+            <a:endParaRPr kumimoji="1" lang="zh-CN" altLang="en-US"/>
+          </a:p>
+        </p:txBody>
+      </p:sp>
+    </p:spTree>
+    <p:extLst>
+      <p:ext uri="{BB962C8B-B14F-4D97-AF65-F5344CB8AC3E}">
+        <p14:creationId xmlns:p14="http://schemas.microsoft.com/office/powerpoint/2010/main" val="2865472700"/>
+      </p:ext>
+    </p:extLst>
+  </p:cSld>
+  <p:clrMapOvr>
+    <a:masterClrMapping/>
+  </p:clrMapOvr>
+</p:notes>
+</file>
+
+<file path=ppt/notesSlides/notesSlide18.xml><?xml version="1.0" encoding="utf-8"?>
+<p:notes xmlns:a="http://schemas.openxmlformats.org/drawingml/2006/main" xmlns:r="http://schemas.openxmlformats.org/officeDocument/2006/relationships" xmlns:p="http://schemas.openxmlformats.org/presentationml/2006/main">
+  <p:cSld>
+    <p:spTree>
+      <p:nvGrpSpPr>
+        <p:cNvPr id="1" name=""/>
+        <p:cNvGrpSpPr/>
+        <p:nvPr/>
+      </p:nvGrpSpPr>
+      <p:grpSpPr>
+        <a:xfrm>
+          <a:off x="0" y="0"/>
+          <a:ext cx="0" cy="0"/>
+          <a:chOff x="0" y="0"/>
+          <a:chExt cx="0" cy="0"/>
+        </a:xfrm>
+      </p:grpSpPr>
+      <p:sp>
+        <p:nvSpPr>
+          <p:cNvPr id="2" name="Slide Image Placeholder 1"/>
+          <p:cNvSpPr>
+            <a:spLocks noGrp="1" noRot="1" noChangeAspect="1"/>
+          </p:cNvSpPr>
+          <p:nvPr>
+            <p:ph type="sldImg"/>
+          </p:nvPr>
+        </p:nvSpPr>
+        <p:spPr/>
+      </p:sp>
+      <p:sp>
+        <p:nvSpPr>
+          <p:cNvPr id="3" name="Notes Placeholder 2"/>
+          <p:cNvSpPr>
+            <a:spLocks noGrp="1"/>
+          </p:cNvSpPr>
+          <p:nvPr>
+            <p:ph type="body" idx="1"/>
+          </p:nvPr>
+        </p:nvSpPr>
+        <p:spPr/>
+        <p:txBody>
+          <a:bodyPr/>
+          <a:lstStyle/>
+          <a:p>
+            <a:endParaRPr lang="zh-CN" altLang="en-US" dirty="0"/>
+          </a:p>
+        </p:txBody>
+      </p:sp>
+      <p:sp>
+        <p:nvSpPr>
+          <p:cNvPr id="4" name="Slide Number Placeholder 3"/>
+          <p:cNvSpPr>
+            <a:spLocks noGrp="1"/>
+          </p:cNvSpPr>
+          <p:nvPr>
+            <p:ph type="sldNum" sz="quarter" idx="5"/>
+          </p:nvPr>
+        </p:nvSpPr>
+        <p:spPr/>
+        <p:txBody>
+          <a:bodyPr/>
+          <a:lstStyle/>
+          <a:p>
+            <a:fld id="{6D18717E-F74C-4246-A795-6577BEDC8382}" type="slidenum">
+              <a:rPr kumimoji="1" lang="zh-CN" altLang="en-US" smtClean="0"/>
+              <a:t>18</a:t>
+            </a:fld>
+            <a:endParaRPr kumimoji="1" lang="zh-CN" altLang="en-US"/>
+          </a:p>
+        </p:txBody>
+      </p:sp>
+    </p:spTree>
+    <p:extLst>
+      <p:ext uri="{BB962C8B-B14F-4D97-AF65-F5344CB8AC3E}">
+        <p14:creationId xmlns:p14="http://schemas.microsoft.com/office/powerpoint/2010/main" val="999709375"/>
+      </p:ext>
+    </p:extLst>
+  </p:cSld>
+  <p:clrMapOvr>
+    <a:masterClrMapping/>
+  </p:clrMapOvr>
+</p:notes>
+</file>
+
+<file path=ppt/notesSlides/notesSlide19.xml><?xml version="1.0" encoding="utf-8"?>
+<p:notes xmlns:a="http://schemas.openxmlformats.org/drawingml/2006/main" xmlns:r="http://schemas.openxmlformats.org/officeDocument/2006/relationships" xmlns:p="http://schemas.openxmlformats.org/presentationml/2006/main">
+  <p:cSld>
+    <p:spTree>
+      <p:nvGrpSpPr>
+        <p:cNvPr id="1" name=""/>
+        <p:cNvGrpSpPr/>
+        <p:nvPr/>
+      </p:nvGrpSpPr>
+      <p:grpSpPr>
+        <a:xfrm>
+          <a:off x="0" y="0"/>
+          <a:ext cx="0" cy="0"/>
+          <a:chOff x="0" y="0"/>
+          <a:chExt cx="0" cy="0"/>
+        </a:xfrm>
+      </p:grpSpPr>
+      <p:sp>
+        <p:nvSpPr>
+          <p:cNvPr id="2" name="Slide Image Placeholder 1"/>
+          <p:cNvSpPr>
+            <a:spLocks noGrp="1" noRot="1" noChangeAspect="1"/>
+          </p:cNvSpPr>
+          <p:nvPr>
+            <p:ph type="sldImg"/>
+          </p:nvPr>
+        </p:nvSpPr>
+        <p:spPr/>
+      </p:sp>
+      <p:sp>
+        <p:nvSpPr>
+          <p:cNvPr id="3" name="Notes Placeholder 2"/>
+          <p:cNvSpPr>
+            <a:spLocks noGrp="1"/>
+          </p:cNvSpPr>
+          <p:nvPr>
+            <p:ph type="body" idx="1"/>
+          </p:nvPr>
+        </p:nvSpPr>
+        <p:spPr/>
+        <p:txBody>
+          <a:bodyPr/>
+          <a:lstStyle/>
+          <a:p>
+            <a:endParaRPr lang="zh-CN" altLang="en-US" dirty="0"/>
+          </a:p>
+        </p:txBody>
+      </p:sp>
+      <p:sp>
+        <p:nvSpPr>
+          <p:cNvPr id="4" name="Slide Number Placeholder 3"/>
+          <p:cNvSpPr>
+            <a:spLocks noGrp="1"/>
+          </p:cNvSpPr>
+          <p:nvPr>
+            <p:ph type="sldNum" sz="quarter" idx="5"/>
+          </p:nvPr>
+        </p:nvSpPr>
+        <p:spPr/>
+        <p:txBody>
+          <a:bodyPr/>
+          <a:lstStyle/>
+          <a:p>
+            <a:fld id="{6D18717E-F74C-4246-A795-6577BEDC8382}" type="slidenum">
+              <a:rPr kumimoji="1" lang="zh-CN" altLang="en-US" smtClean="0"/>
+              <a:t>19</a:t>
+            </a:fld>
+            <a:endParaRPr kumimoji="1" lang="zh-CN" altLang="en-US"/>
+          </a:p>
+        </p:txBody>
+      </p:sp>
+    </p:spTree>
+    <p:extLst>
+      <p:ext uri="{BB962C8B-B14F-4D97-AF65-F5344CB8AC3E}">
+        <p14:creationId xmlns:p14="http://schemas.microsoft.com/office/powerpoint/2010/main" val="2695543178"/>
+      </p:ext>
+    </p:extLst>
+  </p:cSld>
+  <p:clrMapOvr>
+    <a:masterClrMapping/>
+  </p:clrMapOvr>
+</p:notes>
+</file>
+
+<file path=ppt/notesSlides/notesSlide2.xml><?xml version="1.0" encoding="utf-8"?>
+<p:notes xmlns:a="http://schemas.openxmlformats.org/drawingml/2006/main" xmlns:r="http://schemas.openxmlformats.org/officeDocument/2006/relationships" xmlns:p="http://schemas.openxmlformats.org/presentationml/2006/main">
+  <p:cSld>
+    <p:spTree>
+      <p:nvGrpSpPr>
+        <p:cNvPr id="1" name=""/>
+        <p:cNvGrpSpPr/>
+        <p:nvPr/>
+      </p:nvGrpSpPr>
+      <p:grpSpPr>
+        <a:xfrm>
+          <a:off x="0" y="0"/>
+          <a:ext cx="0" cy="0"/>
+          <a:chOff x="0" y="0"/>
+          <a:chExt cx="0" cy="0"/>
+        </a:xfrm>
+      </p:grpSpPr>
+      <p:sp>
+        <p:nvSpPr>
+          <p:cNvPr id="2" name="Slide Image Placeholder 1"/>
+          <p:cNvSpPr>
+            <a:spLocks noGrp="1" noRot="1" noChangeAspect="1"/>
+          </p:cNvSpPr>
+          <p:nvPr>
+            <p:ph type="sldImg"/>
+          </p:nvPr>
+        </p:nvSpPr>
+        <p:spPr/>
+      </p:sp>
+      <p:sp>
+        <p:nvSpPr>
+          <p:cNvPr id="3" name="Notes Placeholder 2"/>
+          <p:cNvSpPr>
+            <a:spLocks noGrp="1"/>
+          </p:cNvSpPr>
+          <p:nvPr>
+            <p:ph type="body" idx="1"/>
+          </p:nvPr>
+        </p:nvSpPr>
+        <p:spPr/>
+        <p:txBody>
+          <a:bodyPr/>
+          <a:lstStyle/>
+          <a:p>
+            <a:endParaRPr lang="zh-CN" altLang="en-US" dirty="0"/>
+          </a:p>
+        </p:txBody>
+      </p:sp>
+      <p:sp>
+        <p:nvSpPr>
+          <p:cNvPr id="4" name="Slide Number Placeholder 3"/>
+          <p:cNvSpPr>
+            <a:spLocks noGrp="1"/>
+          </p:cNvSpPr>
+          <p:nvPr>
+            <p:ph type="sldNum" sz="quarter" idx="5"/>
+          </p:nvPr>
+        </p:nvSpPr>
+        <p:spPr/>
+        <p:txBody>
+          <a:bodyPr/>
+          <a:lstStyle/>
+          <a:p>
+            <a:fld id="{6D18717E-F74C-4246-A795-6577BEDC8382}" type="slidenum">
+              <a:rPr kumimoji="1" lang="zh-CN" altLang="en-US" smtClean="0"/>
+              <a:t>2</a:t>
+            </a:fld>
+            <a:endParaRPr kumimoji="1" lang="zh-CN" altLang="en-US"/>
+          </a:p>
+        </p:txBody>
+      </p:sp>
+    </p:spTree>
+    <p:extLst>
+      <p:ext uri="{BB962C8B-B14F-4D97-AF65-F5344CB8AC3E}">
+        <p14:creationId xmlns:p14="http://schemas.microsoft.com/office/powerpoint/2010/main" val="4232199171"/>
+      </p:ext>
+    </p:extLst>
+  </p:cSld>
+  <p:clrMapOvr>
+    <a:masterClrMapping/>
+  </p:clrMapOvr>
+</p:notes>
+</file>
+
+<file path=ppt/notesSlides/notesSlide20.xml><?xml version="1.0" encoding="utf-8"?>
+<p:notes xmlns:a="http://schemas.openxmlformats.org/drawingml/2006/main" xmlns:r="http://schemas.openxmlformats.org/officeDocument/2006/relationships" xmlns:p="http://schemas.openxmlformats.org/presentationml/2006/main">
+  <p:cSld>
+    <p:spTree>
+      <p:nvGrpSpPr>
+        <p:cNvPr id="1" name=""/>
+        <p:cNvGrpSpPr/>
+        <p:nvPr/>
+      </p:nvGrpSpPr>
+      <p:grpSpPr>
+        <a:xfrm>
+          <a:off x="0" y="0"/>
+          <a:ext cx="0" cy="0"/>
+          <a:chOff x="0" y="0"/>
+          <a:chExt cx="0" cy="0"/>
+        </a:xfrm>
+      </p:grpSpPr>
+      <p:sp>
+        <p:nvSpPr>
+          <p:cNvPr id="2" name="Slide Image Placeholder 1"/>
+          <p:cNvSpPr>
+            <a:spLocks noGrp="1" noRot="1" noChangeAspect="1"/>
+          </p:cNvSpPr>
+          <p:nvPr>
+            <p:ph type="sldImg"/>
+          </p:nvPr>
+        </p:nvSpPr>
+        <p:spPr/>
+      </p:sp>
+      <p:sp>
+        <p:nvSpPr>
+          <p:cNvPr id="3" name="Notes Placeholder 2"/>
+          <p:cNvSpPr>
+            <a:spLocks noGrp="1"/>
+          </p:cNvSpPr>
+          <p:nvPr>
+            <p:ph type="body" idx="1"/>
+          </p:nvPr>
+        </p:nvSpPr>
+        <p:spPr/>
+        <p:txBody>
+          <a:bodyPr/>
+          <a:lstStyle/>
+          <a:p>
+            <a:endParaRPr lang="zh-CN" altLang="en-US" dirty="0"/>
+          </a:p>
+        </p:txBody>
+      </p:sp>
+      <p:sp>
+        <p:nvSpPr>
+          <p:cNvPr id="4" name="Slide Number Placeholder 3"/>
+          <p:cNvSpPr>
+            <a:spLocks noGrp="1"/>
+          </p:cNvSpPr>
+          <p:nvPr>
+            <p:ph type="sldNum" sz="quarter" idx="5"/>
+          </p:nvPr>
+        </p:nvSpPr>
+        <p:spPr/>
+        <p:txBody>
+          <a:bodyPr/>
+          <a:lstStyle/>
+          <a:p>
+            <a:fld id="{6D18717E-F74C-4246-A795-6577BEDC8382}" type="slidenum">
+              <a:rPr kumimoji="1" lang="zh-CN" altLang="en-US" smtClean="0"/>
+              <a:t>20</a:t>
+            </a:fld>
+            <a:endParaRPr kumimoji="1" lang="zh-CN" altLang="en-US"/>
+          </a:p>
+        </p:txBody>
+      </p:sp>
+    </p:spTree>
+    <p:extLst>
+      <p:ext uri="{BB962C8B-B14F-4D97-AF65-F5344CB8AC3E}">
+        <p14:creationId xmlns:p14="http://schemas.microsoft.com/office/powerpoint/2010/main" val="2507865553"/>
+      </p:ext>
+    </p:extLst>
+  </p:cSld>
+  <p:clrMapOvr>
+    <a:masterClrMapping/>
+  </p:clrMapOvr>
+</p:notes>
+</file>
+
+<file path=ppt/notesSlides/notesSlide3.xml><?xml version="1.0" encoding="utf-8"?>
+<p:notes xmlns:a="http://schemas.openxmlformats.org/drawingml/2006/main" xmlns:r="http://schemas.openxmlformats.org/officeDocument/2006/relationships" xmlns:p="http://schemas.openxmlformats.org/presentationml/2006/main">
+  <p:cSld>
+    <p:spTree>
+      <p:nvGrpSpPr>
+        <p:cNvPr id="1" name=""/>
+        <p:cNvGrpSpPr/>
+        <p:nvPr/>
+      </p:nvGrpSpPr>
+      <p:grpSpPr>
+        <a:xfrm>
+          <a:off x="0" y="0"/>
+          <a:ext cx="0" cy="0"/>
+          <a:chOff x="0" y="0"/>
+          <a:chExt cx="0" cy="0"/>
+        </a:xfrm>
+      </p:grpSpPr>
+      <p:sp>
+        <p:nvSpPr>
+          <p:cNvPr id="2" name="Slide Image Placeholder 1"/>
+          <p:cNvSpPr>
+            <a:spLocks noGrp="1" noRot="1" noChangeAspect="1"/>
+          </p:cNvSpPr>
+          <p:nvPr>
+            <p:ph type="sldImg"/>
+          </p:nvPr>
+        </p:nvSpPr>
+        <p:spPr/>
+      </p:sp>
+      <p:sp>
+        <p:nvSpPr>
+          <p:cNvPr id="3" name="Notes Placeholder 2"/>
+          <p:cNvSpPr>
+            <a:spLocks noGrp="1"/>
+          </p:cNvSpPr>
+          <p:nvPr>
+            <p:ph type="body" idx="1"/>
+          </p:nvPr>
+        </p:nvSpPr>
+        <p:spPr/>
+        <p:txBody>
+          <a:bodyPr/>
+          <a:lstStyle/>
+          <a:p>
+            <a:endParaRPr lang="zh-CN" altLang="en-US" dirty="0"/>
+          </a:p>
+        </p:txBody>
+      </p:sp>
+      <p:sp>
+        <p:nvSpPr>
+          <p:cNvPr id="4" name="Slide Number Placeholder 3"/>
+          <p:cNvSpPr>
+            <a:spLocks noGrp="1"/>
+          </p:cNvSpPr>
+          <p:nvPr>
+            <p:ph type="sldNum" sz="quarter" idx="5"/>
+          </p:nvPr>
+        </p:nvSpPr>
+        <p:spPr/>
+        <p:txBody>
+          <a:bodyPr/>
+          <a:lstStyle/>
+          <a:p>
+            <a:fld id="{6D18717E-F74C-4246-A795-6577BEDC8382}" type="slidenum">
+              <a:rPr kumimoji="1" lang="zh-CN" altLang="en-US" smtClean="0"/>
+              <a:t>3</a:t>
+            </a:fld>
+            <a:endParaRPr kumimoji="1" lang="zh-CN" altLang="en-US"/>
+          </a:p>
+        </p:txBody>
+      </p:sp>
+    </p:spTree>
+    <p:extLst>
+      <p:ext uri="{BB962C8B-B14F-4D97-AF65-F5344CB8AC3E}">
+        <p14:creationId xmlns:p14="http://schemas.microsoft.com/office/powerpoint/2010/main" val="1448035776"/>
+      </p:ext>
+    </p:extLst>
+  </p:cSld>
+  <p:clrMapOvr>
+    <a:masterClrMapping/>
+  </p:clrMapOvr>
+</p:notes>
+</file>
+
+<file path=ppt/notesSlides/notesSlide4.xml><?xml version="1.0" encoding="utf-8"?>
+<p:notes xmlns:a="http://schemas.openxmlformats.org/drawingml/2006/main" xmlns:r="http://schemas.openxmlformats.org/officeDocument/2006/relationships" xmlns:p="http://schemas.openxmlformats.org/presentationml/2006/main">
+  <p:cSld>
+    <p:spTree>
+      <p:nvGrpSpPr>
+        <p:cNvPr id="1" name=""/>
+        <p:cNvGrpSpPr/>
+        <p:nvPr/>
+      </p:nvGrpSpPr>
+      <p:grpSpPr>
+        <a:xfrm>
+          <a:off x="0" y="0"/>
+          <a:ext cx="0" cy="0"/>
+          <a:chOff x="0" y="0"/>
+          <a:chExt cx="0" cy="0"/>
+        </a:xfrm>
+      </p:grpSpPr>
+      <p:sp>
+        <p:nvSpPr>
+          <p:cNvPr id="2" name="Slide Image Placeholder 1"/>
+          <p:cNvSpPr>
+            <a:spLocks noGrp="1" noRot="1" noChangeAspect="1"/>
+          </p:cNvSpPr>
+          <p:nvPr>
+            <p:ph type="sldImg"/>
+          </p:nvPr>
+        </p:nvSpPr>
+        <p:spPr/>
+      </p:sp>
+      <p:sp>
+        <p:nvSpPr>
+          <p:cNvPr id="3" name="Notes Placeholder 2"/>
+          <p:cNvSpPr>
+            <a:spLocks noGrp="1"/>
+          </p:cNvSpPr>
+          <p:nvPr>
+            <p:ph type="body" idx="1"/>
+          </p:nvPr>
+        </p:nvSpPr>
+        <p:spPr/>
+        <p:txBody>
+          <a:bodyPr/>
+          <a:lstStyle/>
+          <a:p>
+            <a:endParaRPr lang="zh-CN" altLang="en-US" dirty="0"/>
+          </a:p>
+        </p:txBody>
+      </p:sp>
+      <p:sp>
+        <p:nvSpPr>
+          <p:cNvPr id="4" name="Slide Number Placeholder 3"/>
+          <p:cNvSpPr>
+            <a:spLocks noGrp="1"/>
+          </p:cNvSpPr>
+          <p:nvPr>
+            <p:ph type="sldNum" sz="quarter" idx="5"/>
+          </p:nvPr>
+        </p:nvSpPr>
+        <p:spPr/>
+        <p:txBody>
+          <a:bodyPr/>
+          <a:lstStyle/>
+          <a:p>
+            <a:fld id="{6D18717E-F74C-4246-A795-6577BEDC8382}" type="slidenum">
+              <a:rPr kumimoji="1" lang="zh-CN" altLang="en-US" smtClean="0"/>
+              <a:t>4</a:t>
+            </a:fld>
+            <a:endParaRPr kumimoji="1" lang="zh-CN" altLang="en-US"/>
+          </a:p>
+        </p:txBody>
+      </p:sp>
+    </p:spTree>
+    <p:extLst>
+      <p:ext uri="{BB962C8B-B14F-4D97-AF65-F5344CB8AC3E}">
+        <p14:creationId xmlns:p14="http://schemas.microsoft.com/office/powerpoint/2010/main" val="872940367"/>
+      </p:ext>
+    </p:extLst>
+  </p:cSld>
+  <p:clrMapOvr>
+    <a:masterClrMapping/>
+  </p:clrMapOvr>
+</p:notes>
+</file>
+
+<file path=ppt/notesSlides/notesSlide5.xml><?xml version="1.0" encoding="utf-8"?>
+<p:notes xmlns:a="http://schemas.openxmlformats.org/drawingml/2006/main" xmlns:r="http://schemas.openxmlformats.org/officeDocument/2006/relationships" xmlns:p="http://schemas.openxmlformats.org/presentationml/2006/main">
+  <p:cSld>
+    <p:spTree>
+      <p:nvGrpSpPr>
+        <p:cNvPr id="1" name=""/>
+        <p:cNvGrpSpPr/>
+        <p:nvPr/>
+      </p:nvGrpSpPr>
+      <p:grpSpPr>
+        <a:xfrm>
+          <a:off x="0" y="0"/>
+          <a:ext cx="0" cy="0"/>
+          <a:chOff x="0" y="0"/>
+          <a:chExt cx="0" cy="0"/>
+        </a:xfrm>
+      </p:grpSpPr>
+      <p:sp>
+        <p:nvSpPr>
+          <p:cNvPr id="2" name="Slide Image Placeholder 1"/>
+          <p:cNvSpPr>
+            <a:spLocks noGrp="1" noRot="1" noChangeAspect="1"/>
+          </p:cNvSpPr>
+          <p:nvPr>
+            <p:ph type="sldImg"/>
+          </p:nvPr>
+        </p:nvSpPr>
+        <p:spPr/>
+      </p:sp>
+      <p:sp>
+        <p:nvSpPr>
+          <p:cNvPr id="3" name="Notes Placeholder 2"/>
+          <p:cNvSpPr>
+            <a:spLocks noGrp="1"/>
+          </p:cNvSpPr>
+          <p:nvPr>
+            <p:ph type="body" idx="1"/>
+          </p:nvPr>
+        </p:nvSpPr>
+        <p:spPr/>
+        <p:txBody>
+          <a:bodyPr/>
+          <a:lstStyle/>
+          <a:p>
+            <a:endParaRPr lang="zh-CN" altLang="en-US" dirty="0"/>
+          </a:p>
+        </p:txBody>
+      </p:sp>
+      <p:sp>
+        <p:nvSpPr>
+          <p:cNvPr id="4" name="Slide Number Placeholder 3"/>
+          <p:cNvSpPr>
+            <a:spLocks noGrp="1"/>
+          </p:cNvSpPr>
+          <p:nvPr>
+            <p:ph type="sldNum" sz="quarter" idx="5"/>
+          </p:nvPr>
+        </p:nvSpPr>
+        <p:spPr/>
+        <p:txBody>
+          <a:bodyPr/>
+          <a:lstStyle/>
+          <a:p>
+            <a:fld id="{6D18717E-F74C-4246-A795-6577BEDC8382}" type="slidenum">
+              <a:rPr kumimoji="1" lang="zh-CN" altLang="en-US" smtClean="0"/>
+              <a:t>5</a:t>
+            </a:fld>
+            <a:endParaRPr kumimoji="1" lang="zh-CN" altLang="en-US"/>
+          </a:p>
+        </p:txBody>
+      </p:sp>
+    </p:spTree>
+    <p:extLst>
+      <p:ext uri="{BB962C8B-B14F-4D97-AF65-F5344CB8AC3E}">
+        <p14:creationId xmlns:p14="http://schemas.microsoft.com/office/powerpoint/2010/main" val="305288740"/>
+      </p:ext>
+    </p:extLst>
+  </p:cSld>
+  <p:clrMapOvr>
+    <a:masterClrMapping/>
+  </p:clrMapOvr>
+</p:notes>
+</file>
+
+<file path=ppt/notesSlides/notesSlide6.xml><?xml version="1.0" encoding="utf-8"?>
+<p:notes xmlns:a="http://schemas.openxmlformats.org/drawingml/2006/main" xmlns:r="http://schemas.openxmlformats.org/officeDocument/2006/relationships" xmlns:p="http://schemas.openxmlformats.org/presentationml/2006/main">
+  <p:cSld>
+    <p:spTree>
+      <p:nvGrpSpPr>
+        <p:cNvPr id="1" name=""/>
+        <p:cNvGrpSpPr/>
+        <p:nvPr/>
+      </p:nvGrpSpPr>
+      <p:grpSpPr>
+        <a:xfrm>
+          <a:off x="0" y="0"/>
+          <a:ext cx="0" cy="0"/>
+          <a:chOff x="0" y="0"/>
+          <a:chExt cx="0" cy="0"/>
+        </a:xfrm>
+      </p:grpSpPr>
+      <p:sp>
+        <p:nvSpPr>
+          <p:cNvPr id="2" name="Slide Image Placeholder 1"/>
+          <p:cNvSpPr>
+            <a:spLocks noGrp="1" noRot="1" noChangeAspect="1"/>
+          </p:cNvSpPr>
+          <p:nvPr>
+            <p:ph type="sldImg"/>
+          </p:nvPr>
+        </p:nvSpPr>
+        <p:spPr/>
+      </p:sp>
+      <p:sp>
+        <p:nvSpPr>
+          <p:cNvPr id="3" name="Notes Placeholder 2"/>
+          <p:cNvSpPr>
+            <a:spLocks noGrp="1"/>
+          </p:cNvSpPr>
+          <p:nvPr>
+            <p:ph type="body" idx="1"/>
+          </p:nvPr>
+        </p:nvSpPr>
+        <p:spPr/>
+        <p:txBody>
+          <a:bodyPr/>
+          <a:lstStyle/>
+          <a:p>
+            <a:endParaRPr lang="zh-CN" altLang="en-US" dirty="0"/>
+          </a:p>
+        </p:txBody>
+      </p:sp>
+      <p:sp>
+        <p:nvSpPr>
+          <p:cNvPr id="4" name="Slide Number Placeholder 3"/>
+          <p:cNvSpPr>
+            <a:spLocks noGrp="1"/>
+          </p:cNvSpPr>
+          <p:nvPr>
+            <p:ph type="sldNum" sz="quarter" idx="5"/>
+          </p:nvPr>
+        </p:nvSpPr>
+        <p:spPr/>
+        <p:txBody>
+          <a:bodyPr/>
+          <a:lstStyle/>
+          <a:p>
+            <a:fld id="{6D18717E-F74C-4246-A795-6577BEDC8382}" type="slidenum">
+              <a:rPr kumimoji="1" lang="zh-CN" altLang="en-US" smtClean="0"/>
+              <a:t>6</a:t>
+            </a:fld>
+            <a:endParaRPr kumimoji="1" lang="zh-CN" altLang="en-US"/>
+          </a:p>
+        </p:txBody>
+      </p:sp>
+    </p:spTree>
+    <p:extLst>
+      <p:ext uri="{BB962C8B-B14F-4D97-AF65-F5344CB8AC3E}">
+        <p14:creationId xmlns:p14="http://schemas.microsoft.com/office/powerpoint/2010/main" val="2280478255"/>
+      </p:ext>
+    </p:extLst>
+  </p:cSld>
+  <p:clrMapOvr>
+    <a:masterClrMapping/>
+  </p:clrMapOvr>
+</p:notes>
+</file>
+
+<file path=ppt/notesSlides/notesSlide7.xml><?xml version="1.0" encoding="utf-8"?>
+<p:notes xmlns:a="http://schemas.openxmlformats.org/drawingml/2006/main" xmlns:r="http://schemas.openxmlformats.org/officeDocument/2006/relationships" xmlns:p="http://schemas.openxmlformats.org/presentationml/2006/main">
+  <p:cSld>
+    <p:spTree>
+      <p:nvGrpSpPr>
+        <p:cNvPr id="1" name=""/>
+        <p:cNvGrpSpPr/>
+        <p:nvPr/>
+      </p:nvGrpSpPr>
+      <p:grpSpPr>
+        <a:xfrm>
+          <a:off x="0" y="0"/>
+          <a:ext cx="0" cy="0"/>
+          <a:chOff x="0" y="0"/>
+          <a:chExt cx="0" cy="0"/>
+        </a:xfrm>
+      </p:grpSpPr>
+      <p:sp>
+        <p:nvSpPr>
+          <p:cNvPr id="2" name="Slide Image Placeholder 1"/>
+          <p:cNvSpPr>
+            <a:spLocks noGrp="1" noRot="1" noChangeAspect="1"/>
+          </p:cNvSpPr>
+          <p:nvPr>
+            <p:ph type="sldImg"/>
+          </p:nvPr>
+        </p:nvSpPr>
+        <p:spPr/>
+      </p:sp>
+      <p:sp>
+        <p:nvSpPr>
+          <p:cNvPr id="3" name="Notes Placeholder 2"/>
+          <p:cNvSpPr>
+            <a:spLocks noGrp="1"/>
+          </p:cNvSpPr>
+          <p:nvPr>
+            <p:ph type="body" idx="1"/>
+          </p:nvPr>
+        </p:nvSpPr>
+        <p:spPr/>
+        <p:txBody>
+          <a:bodyPr/>
+          <a:lstStyle/>
+          <a:p>
+            <a:endParaRPr lang="zh-CN" altLang="en-US" dirty="0"/>
+          </a:p>
+        </p:txBody>
+      </p:sp>
+      <p:sp>
+        <p:nvSpPr>
+          <p:cNvPr id="4" name="Slide Number Placeholder 3"/>
+          <p:cNvSpPr>
+            <a:spLocks noGrp="1"/>
+          </p:cNvSpPr>
+          <p:nvPr>
+            <p:ph type="sldNum" sz="quarter" idx="5"/>
+          </p:nvPr>
+        </p:nvSpPr>
+        <p:spPr/>
+        <p:txBody>
+          <a:bodyPr/>
+          <a:lstStyle/>
+          <a:p>
+            <a:fld id="{6D18717E-F74C-4246-A795-6577BEDC8382}" type="slidenum">
+              <a:rPr kumimoji="1" lang="zh-CN" altLang="en-US" smtClean="0"/>
+              <a:t>7</a:t>
+            </a:fld>
+            <a:endParaRPr kumimoji="1" lang="zh-CN" altLang="en-US"/>
+          </a:p>
+        </p:txBody>
+      </p:sp>
+    </p:spTree>
+    <p:extLst>
+      <p:ext uri="{BB962C8B-B14F-4D97-AF65-F5344CB8AC3E}">
+        <p14:creationId xmlns:p14="http://schemas.microsoft.com/office/powerpoint/2010/main" val="873138766"/>
+      </p:ext>
+    </p:extLst>
+  </p:cSld>
+  <p:clrMapOvr>
+    <a:masterClrMapping/>
+  </p:clrMapOvr>
+</p:notes>
+</file>
+
+<file path=ppt/notesSlides/notesSlide8.xml><?xml version="1.0" encoding="utf-8"?>
+<p:notes xmlns:a="http://schemas.openxmlformats.org/drawingml/2006/main" xmlns:r="http://schemas.openxmlformats.org/officeDocument/2006/relationships" xmlns:p="http://schemas.openxmlformats.org/presentationml/2006/main">
+  <p:cSld>
+    <p:spTree>
+      <p:nvGrpSpPr>
+        <p:cNvPr id="1" name=""/>
+        <p:cNvGrpSpPr/>
+        <p:nvPr/>
+      </p:nvGrpSpPr>
+      <p:grpSpPr>
+        <a:xfrm>
+          <a:off x="0" y="0"/>
+          <a:ext cx="0" cy="0"/>
+          <a:chOff x="0" y="0"/>
+          <a:chExt cx="0" cy="0"/>
+        </a:xfrm>
+      </p:grpSpPr>
+      <p:sp>
+        <p:nvSpPr>
+          <p:cNvPr id="2" name="Slide Image Placeholder 1"/>
+          <p:cNvSpPr>
+            <a:spLocks noGrp="1" noRot="1" noChangeAspect="1"/>
+          </p:cNvSpPr>
+          <p:nvPr>
+            <p:ph type="sldImg"/>
+          </p:nvPr>
+        </p:nvSpPr>
+        <p:spPr/>
+      </p:sp>
+      <p:sp>
+        <p:nvSpPr>
+          <p:cNvPr id="3" name="Notes Placeholder 2"/>
+          <p:cNvSpPr>
+            <a:spLocks noGrp="1"/>
+          </p:cNvSpPr>
+          <p:nvPr>
+            <p:ph type="body" idx="1"/>
+          </p:nvPr>
+        </p:nvSpPr>
+        <p:spPr/>
+        <p:txBody>
+          <a:bodyPr/>
+          <a:lstStyle/>
+          <a:p>
+            <a:endParaRPr lang="zh-CN" altLang="en-US" dirty="0"/>
+          </a:p>
+        </p:txBody>
+      </p:sp>
+      <p:sp>
+        <p:nvSpPr>
+          <p:cNvPr id="4" name="Slide Number Placeholder 3"/>
+          <p:cNvSpPr>
+            <a:spLocks noGrp="1"/>
+          </p:cNvSpPr>
+          <p:nvPr>
+            <p:ph type="sldNum" sz="quarter" idx="5"/>
+          </p:nvPr>
+        </p:nvSpPr>
+        <p:spPr/>
+        <p:txBody>
+          <a:bodyPr/>
+          <a:lstStyle/>
+          <a:p>
+            <a:fld id="{6D18717E-F74C-4246-A795-6577BEDC8382}" type="slidenum">
+              <a:rPr kumimoji="1" lang="zh-CN" altLang="en-US" smtClean="0"/>
+              <a:t>8</a:t>
+            </a:fld>
+            <a:endParaRPr kumimoji="1" lang="zh-CN" altLang="en-US"/>
+          </a:p>
+        </p:txBody>
+      </p:sp>
+    </p:spTree>
+    <p:extLst>
+      <p:ext uri="{BB962C8B-B14F-4D97-AF65-F5344CB8AC3E}">
+        <p14:creationId xmlns:p14="http://schemas.microsoft.com/office/powerpoint/2010/main" val="126500358"/>
+      </p:ext>
+    </p:extLst>
+  </p:cSld>
+  <p:clrMapOvr>
+    <a:masterClrMapping/>
+  </p:clrMapOvr>
+</p:notes>
+</file>
+
+<file path=ppt/notesSlides/notesSlide9.xml><?xml version="1.0" encoding="utf-8"?>
+<p:notes xmlns:a="http://schemas.openxmlformats.org/drawingml/2006/main" xmlns:r="http://schemas.openxmlformats.org/officeDocument/2006/relationships" xmlns:p="http://schemas.openxmlformats.org/presentationml/2006/main">
+  <p:cSld>
+    <p:spTree>
+      <p:nvGrpSpPr>
+        <p:cNvPr id="1" name=""/>
+        <p:cNvGrpSpPr/>
+        <p:nvPr/>
+      </p:nvGrpSpPr>
+      <p:grpSpPr>
+        <a:xfrm>
+          <a:off x="0" y="0"/>
+          <a:ext cx="0" cy="0"/>
+          <a:chOff x="0" y="0"/>
+          <a:chExt cx="0" cy="0"/>
+        </a:xfrm>
+      </p:grpSpPr>
+      <p:sp>
+        <p:nvSpPr>
+          <p:cNvPr id="2" name="Slide Image Placeholder 1"/>
+          <p:cNvSpPr>
+            <a:spLocks noGrp="1" noRot="1" noChangeAspect="1"/>
+          </p:cNvSpPr>
+          <p:nvPr>
+            <p:ph type="sldImg"/>
+          </p:nvPr>
+        </p:nvSpPr>
+        <p:spPr/>
+      </p:sp>
+      <p:sp>
+        <p:nvSpPr>
+          <p:cNvPr id="3" name="Notes Placeholder 2"/>
+          <p:cNvSpPr>
+            <a:spLocks noGrp="1"/>
+          </p:cNvSpPr>
+          <p:nvPr>
+            <p:ph type="body" idx="1"/>
+          </p:nvPr>
+        </p:nvSpPr>
+        <p:spPr/>
+        <p:txBody>
+          <a:bodyPr/>
+          <a:lstStyle/>
+          <a:p>
+            <a:endParaRPr lang="zh-CN" altLang="en-US" dirty="0"/>
+          </a:p>
+        </p:txBody>
+      </p:sp>
+      <p:sp>
+        <p:nvSpPr>
+          <p:cNvPr id="4" name="Slide Number Placeholder 3"/>
+          <p:cNvSpPr>
+            <a:spLocks noGrp="1"/>
+          </p:cNvSpPr>
+          <p:nvPr>
+            <p:ph type="sldNum" sz="quarter" idx="5"/>
+          </p:nvPr>
+        </p:nvSpPr>
+        <p:spPr/>
+        <p:txBody>
+          <a:bodyPr/>
+          <a:lstStyle/>
+          <a:p>
+            <a:fld id="{6D18717E-F74C-4246-A795-6577BEDC8382}" type="slidenum">
+              <a:rPr kumimoji="1" lang="zh-CN" altLang="en-US" smtClean="0"/>
+              <a:t>9</a:t>
+            </a:fld>
+            <a:endParaRPr kumimoji="1" lang="zh-CN" altLang="en-US"/>
+          </a:p>
+        </p:txBody>
+      </p:sp>
+    </p:spTree>
+    <p:extLst>
+      <p:ext uri="{BB962C8B-B14F-4D97-AF65-F5344CB8AC3E}">
+        <p14:creationId xmlns:p14="http://schemas.microsoft.com/office/powerpoint/2010/main" val="3414935893"/>
+      </p:ext>
+    </p:extLst>
+  </p:cSld>
+  <p:clrMapOvr>
+    <a:masterClrMapping/>
+  </p:clrMapOvr>
+</p:notes>
 </file>
 
 <file path=ppt/slideLayouts/slideLayout1.xml><?xml version="1.0" encoding="utf-8"?>
@@ -775,7 +2463,7 @@
           <a:p>
             <a:fld id="{E4551058-E5DB-324A-A8E9-6D3BEF243C3B}" type="datetimeFigureOut">
               <a:rPr kumimoji="1" lang="zh-CN" altLang="en-US" smtClean="0"/>
-              <a:t>2022/12/25</a:t>
+              <a:t>2023/1/23</a:t>
             </a:fld>
             <a:endParaRPr kumimoji="1" lang="zh-CN" altLang="en-US"/>
           </a:p>
@@ -1096,7 +2784,7 @@
           <a:p>
             <a:fld id="{E4551058-E5DB-324A-A8E9-6D3BEF243C3B}" type="datetimeFigureOut">
               <a:rPr kumimoji="1" lang="zh-CN" altLang="en-US" smtClean="0"/>
-              <a:t>2022/12/25</a:t>
+              <a:t>2023/1/23</a:t>
             </a:fld>
             <a:endParaRPr kumimoji="1" lang="zh-CN" altLang="en-US"/>
           </a:p>
@@ -1259,7 +2947,7 @@
           <a:p>
             <a:fld id="{E4551058-E5DB-324A-A8E9-6D3BEF243C3B}" type="datetimeFigureOut">
               <a:rPr kumimoji="1" lang="zh-CN" altLang="en-US" smtClean="0"/>
-              <a:t>2022/12/25</a:t>
+              <a:t>2023/1/23</a:t>
             </a:fld>
             <a:endParaRPr kumimoji="1" lang="zh-CN" altLang="en-US"/>
           </a:p>
@@ -1533,7 +3221,7 @@
           <a:p>
             <a:fld id="{E4551058-E5DB-324A-A8E9-6D3BEF243C3B}" type="datetimeFigureOut">
               <a:rPr kumimoji="1" lang="zh-CN" altLang="en-US" smtClean="0"/>
-              <a:t>2022/12/25</a:t>
+              <a:t>2023/1/23</a:t>
             </a:fld>
             <a:endParaRPr kumimoji="1" lang="zh-CN" altLang="en-US"/>
           </a:p>
@@ -1731,7 +3419,7 @@
           <a:p>
             <a:fld id="{E4551058-E5DB-324A-A8E9-6D3BEF243C3B}" type="datetimeFigureOut">
               <a:rPr kumimoji="1" lang="zh-CN" altLang="en-US" smtClean="0"/>
-              <a:t>2022/12/25</a:t>
+              <a:t>2023/1/23</a:t>
             </a:fld>
             <a:endParaRPr kumimoji="1" lang="zh-CN" altLang="en-US"/>
           </a:p>
@@ -1930,7 +3618,7 @@
           <a:p>
             <a:fld id="{E4551058-E5DB-324A-A8E9-6D3BEF243C3B}" type="datetimeFigureOut">
               <a:rPr kumimoji="1" lang="zh-CN" altLang="en-US" smtClean="0"/>
-              <a:t>2022/12/25</a:t>
+              <a:t>2023/1/23</a:t>
             </a:fld>
             <a:endParaRPr kumimoji="1" lang="zh-CN" altLang="en-US"/>
           </a:p>
@@ -2322,7 +4010,7 @@
           <a:p>
             <a:fld id="{E4551058-E5DB-324A-A8E9-6D3BEF243C3B}" type="datetimeFigureOut">
               <a:rPr kumimoji="1" lang="zh-CN" altLang="en-US" smtClean="0"/>
-              <a:t>2022/12/25</a:t>
+              <a:t>2023/1/23</a:t>
             </a:fld>
             <a:endParaRPr kumimoji="1" lang="zh-CN" altLang="en-US"/>
           </a:p>
@@ -2721,7 +4409,7 @@
           <a:p>
             <a:fld id="{E4551058-E5DB-324A-A8E9-6D3BEF243C3B}" type="datetimeFigureOut">
               <a:rPr kumimoji="1" lang="zh-CN" altLang="en-US" smtClean="0"/>
-              <a:t>2022/12/25</a:t>
+              <a:t>2023/1/23</a:t>
             </a:fld>
             <a:endParaRPr kumimoji="1" lang="zh-CN" altLang="en-US"/>
           </a:p>
@@ -3104,7 +4792,7 @@
           <a:p>
             <a:fld id="{E4551058-E5DB-324A-A8E9-6D3BEF243C3B}" type="datetimeFigureOut">
               <a:rPr kumimoji="1" lang="zh-CN" altLang="en-US" smtClean="0"/>
-              <a:t>2022/12/25</a:t>
+              <a:t>2023/1/23</a:t>
             </a:fld>
             <a:endParaRPr kumimoji="1" lang="zh-CN" altLang="en-US"/>
           </a:p>
@@ -3227,7 +4915,7 @@
           <a:p>
             <a:fld id="{E4551058-E5DB-324A-A8E9-6D3BEF243C3B}" type="datetimeFigureOut">
               <a:rPr kumimoji="1" lang="zh-CN" altLang="en-US" smtClean="0"/>
-              <a:t>2022/12/25</a:t>
+              <a:t>2023/1/23</a:t>
             </a:fld>
             <a:endParaRPr kumimoji="1" lang="zh-CN" altLang="en-US"/>
           </a:p>
@@ -3350,7 +5038,7 @@
           <a:p>
             <a:fld id="{E4551058-E5DB-324A-A8E9-6D3BEF243C3B}" type="datetimeFigureOut">
               <a:rPr kumimoji="1" lang="zh-CN" altLang="en-US" smtClean="0"/>
-              <a:t>2022/12/25</a:t>
+              <a:t>2023/1/23</a:t>
             </a:fld>
             <a:endParaRPr kumimoji="1" lang="zh-CN" altLang="en-US"/>
           </a:p>
@@ -3736,7 +5424,7 @@
           <a:p>
             <a:fld id="{E4551058-E5DB-324A-A8E9-6D3BEF243C3B}" type="datetimeFigureOut">
               <a:rPr kumimoji="1" lang="zh-CN" altLang="en-US" smtClean="0"/>
-              <a:t>2022/12/25</a:t>
+              <a:t>2023/1/23</a:t>
             </a:fld>
             <a:endParaRPr kumimoji="1" lang="zh-CN" altLang="en-US"/>
           </a:p>
@@ -4023,7 +5711,7 @@
           <a:p>
             <a:fld id="{E4551058-E5DB-324A-A8E9-6D3BEF243C3B}" type="datetimeFigureOut">
               <a:rPr kumimoji="1" lang="zh-CN" altLang="en-US" smtClean="0"/>
-              <a:t>2022/12/25</a:t>
+              <a:t>2023/1/23</a:t>
             </a:fld>
             <a:endParaRPr kumimoji="1" lang="zh-CN" altLang="en-US"/>
           </a:p>
@@ -4662,6 +6350,14 @@
   <p:clrMapOvr>
     <a:masterClrMapping/>
   </p:clrMapOvr>
+  <mc:AlternateContent xmlns:mc="http://schemas.openxmlformats.org/markup-compatibility/2006" xmlns:p14="http://schemas.microsoft.com/office/powerpoint/2010/main">
+    <mc:Choice Requires="p14">
+      <p:transition spd="slow" p14:dur="2000" advTm="15179"/>
+    </mc:Choice>
+    <mc:Fallback xmlns="">
+      <p:transition spd="slow" advTm="15179"/>
+    </mc:Fallback>
+  </mc:AlternateContent>
 </p:sld>
 </file>
 
@@ -4716,8 +6412,8 @@
           </a:p>
         </p:txBody>
       </p:sp>
-      <mc:AlternateContent xmlns:mc="http://schemas.openxmlformats.org/markup-compatibility/2006">
-        <mc:Choice xmlns:a14="http://schemas.microsoft.com/office/drawing/2010/main" Requires="a14">
+      <mc:AlternateContent xmlns:mc="http://schemas.openxmlformats.org/markup-compatibility/2006" xmlns:a14="http://schemas.microsoft.com/office/drawing/2010/main">
+        <mc:Choice Requires="a14">
           <p:sp>
             <p:nvSpPr>
               <p:cNvPr id="2" name="Content Placeholder 3">
@@ -4857,7 +6553,7 @@
             </p:txBody>
           </p:sp>
         </mc:Choice>
-        <mc:Fallback>
+        <mc:Fallback xmlns="">
           <p:sp>
             <p:nvSpPr>
               <p:cNvPr id="2" name="Content Placeholder 3">
@@ -4880,7 +6576,7 @@
                 <a:ext cx="10521388" cy="4213166"/>
               </a:xfrm>
               <a:blipFill>
-                <a:blip r:embed="rId2"/>
+                <a:blip r:embed="rId5"/>
                 <a:stretch>
                   <a:fillRect l="-463" t="-434"/>
                 </a:stretch>
@@ -4911,6 +6607,14 @@
   <p:clrMapOvr>
     <a:masterClrMapping/>
   </p:clrMapOvr>
+  <mc:AlternateContent xmlns:mc="http://schemas.openxmlformats.org/markup-compatibility/2006" xmlns:p14="http://schemas.microsoft.com/office/powerpoint/2010/main">
+    <mc:Choice Requires="p14">
+      <p:transition spd="slow" p14:dur="2000" advTm="67160"/>
+    </mc:Choice>
+    <mc:Fallback xmlns="">
+      <p:transition spd="slow" advTm="67160"/>
+    </mc:Fallback>
+  </mc:AlternateContent>
 </p:sld>
 </file>
 
@@ -5078,6 +6782,14 @@
   <p:clrMapOvr>
     <a:masterClrMapping/>
   </p:clrMapOvr>
+  <mc:AlternateContent xmlns:mc="http://schemas.openxmlformats.org/markup-compatibility/2006" xmlns:p14="http://schemas.microsoft.com/office/powerpoint/2010/main">
+    <mc:Choice Requires="p14">
+      <p:transition spd="slow" p14:dur="2000" advTm="59515"/>
+    </mc:Choice>
+    <mc:Fallback xmlns="">
+      <p:transition spd="slow" advTm="59515"/>
+    </mc:Fallback>
+  </mc:AlternateContent>
 </p:sld>
 </file>
 
@@ -5132,8 +6844,8 @@
           </a:p>
         </p:txBody>
       </p:sp>
-      <mc:AlternateContent xmlns:mc="http://schemas.openxmlformats.org/markup-compatibility/2006">
-        <mc:Choice xmlns:a14="http://schemas.microsoft.com/office/drawing/2010/main" Requires="a14">
+      <mc:AlternateContent xmlns:mc="http://schemas.openxmlformats.org/markup-compatibility/2006" xmlns:a14="http://schemas.microsoft.com/office/drawing/2010/main">
+        <mc:Choice Requires="a14">
           <p:sp>
             <p:nvSpPr>
               <p:cNvPr id="2" name="Content Placeholder 3">
@@ -5178,18 +6890,24 @@
                     <m:sSub>
                       <m:sSubPr>
                         <m:ctrlPr>
-                          <a:rPr lang="zh-CN" altLang="zh-CN"/>
+                          <a:rPr lang="zh-CN" altLang="zh-CN" i="1">
+                            <a:latin typeface="Cambria Math" panose="02040503050406030204" pitchFamily="18" charset="0"/>
+                          </a:rPr>
                         </m:ctrlPr>
                       </m:sSubPr>
                       <m:e>
                         <m:r>
-                          <a:rPr lang="en-US" altLang="zh-CN"/>
+                          <a:rPr lang="en-US" altLang="zh-CN">
+                            <a:latin typeface="Cambria Math" panose="02040503050406030204" pitchFamily="18" charset="0"/>
+                          </a:rPr>
                           <m:t>𝑓</m:t>
                         </m:r>
                       </m:e>
                       <m:sub>
                         <m:r>
-                          <a:rPr lang="en-US" altLang="zh-CN"/>
+                          <a:rPr lang="en-US" altLang="zh-CN">
+                            <a:latin typeface="Cambria Math" panose="02040503050406030204" pitchFamily="18" charset="0"/>
+                          </a:rPr>
                           <m:t>𝑋</m:t>
                         </m:r>
                       </m:sub>
@@ -5206,19 +6924,27 @@
                       <m:rPr>
                         <m:sty m:val="p"/>
                       </m:rPr>
-                      <a:rPr lang="en-US" altLang="zh-CN"/>
+                      <a:rPr lang="en-US" altLang="zh-CN">
+                        <a:latin typeface="Cambria Math" panose="02040503050406030204" pitchFamily="18" charset="0"/>
+                      </a:rPr>
                       <m:t>Pr</m:t>
                     </m:r>
                     <m:r>
-                      <a:rPr lang="en-US" altLang="zh-CN"/>
+                      <a:rPr lang="en-US" altLang="zh-CN">
+                        <a:latin typeface="Cambria Math" panose="02040503050406030204" pitchFamily="18" charset="0"/>
+                      </a:rPr>
                       <m:t>{</m:t>
                     </m:r>
                     <m:r>
-                      <a:rPr lang="en-US" altLang="zh-CN"/>
+                      <a:rPr lang="en-US" altLang="zh-CN">
+                        <a:latin typeface="Cambria Math" panose="02040503050406030204" pitchFamily="18" charset="0"/>
+                      </a:rPr>
                       <m:t>𝑋</m:t>
                     </m:r>
                     <m:r>
-                      <a:rPr lang="en-US" altLang="zh-CN"/>
+                      <a:rPr lang="en-US" altLang="zh-CN">
+                        <a:latin typeface="Cambria Math" panose="02040503050406030204" pitchFamily="18" charset="0"/>
+                      </a:rPr>
                       <m:t>=1}</m:t>
                     </m:r>
                   </m:oMath>
@@ -5239,18 +6965,24 @@
                     <m:sSub>
                       <m:sSubPr>
                         <m:ctrlPr>
-                          <a:rPr lang="zh-CN" altLang="zh-CN"/>
+                          <a:rPr lang="zh-CN" altLang="zh-CN" i="1">
+                            <a:latin typeface="Cambria Math" panose="02040503050406030204" pitchFamily="18" charset="0"/>
+                          </a:rPr>
                         </m:ctrlPr>
                       </m:sSubPr>
                       <m:e>
                         <m:r>
-                          <a:rPr lang="en-US" altLang="zh-CN"/>
+                          <a:rPr lang="en-US" altLang="zh-CN">
+                            <a:latin typeface="Cambria Math" panose="02040503050406030204" pitchFamily="18" charset="0"/>
+                          </a:rPr>
                           <m:t>𝑓</m:t>
                         </m:r>
                       </m:e>
                       <m:sub>
                         <m:r>
-                          <a:rPr lang="en-US" altLang="zh-CN"/>
+                          <a:rPr lang="en-US" altLang="zh-CN">
+                            <a:latin typeface="Cambria Math" panose="02040503050406030204" pitchFamily="18" charset="0"/>
+                          </a:rPr>
                           <m:t>𝑋</m:t>
                         </m:r>
                       </m:sub>
@@ -5267,11 +6999,15 @@
                       <m:rPr>
                         <m:sty m:val="p"/>
                       </m:rPr>
-                      <a:rPr lang="en-US" altLang="zh-CN"/>
+                      <a:rPr lang="en-US" altLang="zh-CN">
+                        <a:latin typeface="Cambria Math" panose="02040503050406030204" pitchFamily="18" charset="0"/>
+                      </a:rPr>
                       <m:t>κ</m:t>
                     </m:r>
                     <m:r>
-                      <a:rPr lang="en-US" altLang="zh-CN"/>
+                      <a:rPr lang="en-US" altLang="zh-CN">
+                        <a:latin typeface="Cambria Math" panose="02040503050406030204" pitchFamily="18" charset="0"/>
+                      </a:rPr>
                       <m:t>&gt;0</m:t>
                     </m:r>
                   </m:oMath>
@@ -5285,24 +7021,32 @@
                     <m:sSubSup>
                       <m:sSubSupPr>
                         <m:ctrlPr>
-                          <a:rPr lang="zh-CN" altLang="zh-CN"/>
+                          <a:rPr lang="zh-CN" altLang="zh-CN" i="1">
+                            <a:latin typeface="Cambria Math" panose="02040503050406030204" pitchFamily="18" charset="0"/>
+                          </a:rPr>
                         </m:ctrlPr>
                       </m:sSubSupPr>
                       <m:e>
                         <m:r>
-                          <a:rPr lang="en-US" altLang="zh-CN"/>
+                          <a:rPr lang="en-US" altLang="zh-CN">
+                            <a:latin typeface="Cambria Math" panose="02040503050406030204" pitchFamily="18" charset="0"/>
+                          </a:rPr>
                           <m:t>𝛉</m:t>
                         </m:r>
                       </m:e>
                       <m:sub>
                         <m:r>
-                          <a:rPr lang="en-US" altLang="zh-CN"/>
+                          <a:rPr lang="en-US" altLang="zh-CN">
+                            <a:latin typeface="Cambria Math" panose="02040503050406030204" pitchFamily="18" charset="0"/>
+                          </a:rPr>
                           <m:t>𝑋</m:t>
                         </m:r>
                       </m:sub>
                       <m:sup>
                         <m:r>
-                          <a:rPr lang="en-US" altLang="zh-CN"/>
+                          <a:rPr lang="en-US" altLang="zh-CN">
+                            <a:latin typeface="Cambria Math" panose="02040503050406030204" pitchFamily="18" charset="0"/>
+                          </a:rPr>
                           <m:t>∗</m:t>
                         </m:r>
                       </m:sup>
@@ -5386,18 +7130,24 @@
                     <m:sSub>
                       <m:sSubPr>
                         <m:ctrlPr>
-                          <a:rPr lang="zh-CN" altLang="zh-CN"/>
+                          <a:rPr lang="zh-CN" altLang="zh-CN" i="1">
+                            <a:latin typeface="Cambria Math" panose="02040503050406030204" pitchFamily="18" charset="0"/>
+                          </a:rPr>
                         </m:ctrlPr>
                       </m:sSubPr>
                       <m:e>
                         <m:r>
-                          <a:rPr lang="en-US" altLang="zh-CN"/>
+                          <a:rPr lang="en-US" altLang="zh-CN">
+                            <a:latin typeface="Cambria Math" panose="02040503050406030204" pitchFamily="18" charset="0"/>
+                          </a:rPr>
                           <m:t>𝑇</m:t>
                         </m:r>
                       </m:e>
                       <m:sub>
                         <m:r>
-                          <a:rPr lang="en-US" altLang="zh-CN"/>
+                          <a:rPr lang="en-US" altLang="zh-CN">
+                            <a:latin typeface="Cambria Math" panose="02040503050406030204" pitchFamily="18" charset="0"/>
+                          </a:rPr>
                           <m:t>0</m:t>
                         </m:r>
                       </m:sub>
@@ -5413,55 +7163,73 @@
                     <m:sSub>
                       <m:sSubPr>
                         <m:ctrlPr>
-                          <a:rPr lang="zh-CN" altLang="zh-CN" i="1"/>
+                          <a:rPr lang="zh-CN" altLang="zh-CN" i="1">
+                            <a:latin typeface="Cambria Math" panose="02040503050406030204" pitchFamily="18" charset="0"/>
+                          </a:rPr>
                         </m:ctrlPr>
                       </m:sSubPr>
                       <m:e>
                         <m:d>
                           <m:dPr>
                             <m:ctrlPr>
-                              <a:rPr lang="zh-CN" altLang="zh-CN" i="1"/>
+                              <a:rPr lang="zh-CN" altLang="zh-CN" i="1">
+                                <a:latin typeface="Cambria Math" panose="02040503050406030204" pitchFamily="18" charset="0"/>
+                              </a:rPr>
                             </m:ctrlPr>
                           </m:dPr>
                           <m:e>
                             <m:sSub>
                               <m:sSubPr>
                                 <m:ctrlPr>
-                                  <a:rPr lang="zh-CN" altLang="zh-CN" i="1"/>
+                                  <a:rPr lang="zh-CN" altLang="zh-CN" i="1">
+                                    <a:latin typeface="Cambria Math" panose="02040503050406030204" pitchFamily="18" charset="0"/>
+                                  </a:rPr>
                                 </m:ctrlPr>
                               </m:sSubPr>
                               <m:e>
                                 <m:r>
-                                  <a:rPr lang="en-US" altLang="zh-CN" b="1" i="1"/>
+                                  <a:rPr lang="en-US" altLang="zh-CN" b="1" i="1">
+                                    <a:latin typeface="Cambria Math" panose="02040503050406030204" pitchFamily="18" charset="0"/>
+                                  </a:rPr>
                                   <m:t>𝑿</m:t>
                                 </m:r>
                               </m:e>
                               <m:sub>
                                 <m:r>
-                                  <a:rPr lang="en-US" altLang="zh-CN" i="1"/>
+                                  <a:rPr lang="en-US" altLang="zh-CN" i="1">
+                                    <a:latin typeface="Cambria Math" panose="02040503050406030204" pitchFamily="18" charset="0"/>
+                                  </a:rPr>
                                   <m:t>𝑡</m:t>
                                 </m:r>
                               </m:sub>
                             </m:sSub>
                             <m:r>
-                              <a:rPr lang="en-US" altLang="zh-CN" i="1"/>
+                              <a:rPr lang="en-US" altLang="zh-CN" i="1">
+                                <a:latin typeface="Cambria Math" panose="02040503050406030204" pitchFamily="18" charset="0"/>
+                              </a:rPr>
                               <m:t>,</m:t>
                             </m:r>
                             <m:sSub>
                               <m:sSubPr>
                                 <m:ctrlPr>
-                                  <a:rPr lang="zh-CN" altLang="zh-CN" i="1"/>
+                                  <a:rPr lang="zh-CN" altLang="zh-CN" i="1">
+                                    <a:latin typeface="Cambria Math" panose="02040503050406030204" pitchFamily="18" charset="0"/>
+                                  </a:rPr>
                                 </m:ctrlPr>
                               </m:sSubPr>
                               <m:e>
                                 <m:r>
-                                  <a:rPr lang="en-US" altLang="zh-CN" i="1"/>
+                                  <a:rPr lang="en-US" altLang="zh-CN" i="1">
+                                    <a:latin typeface="Cambria Math" panose="02040503050406030204" pitchFamily="18" charset="0"/>
+                                  </a:rPr>
                                   <m:t>𝑌</m:t>
                                 </m:r>
                               </m:e>
                               <m:sub>
                                 <m:r>
-                                  <a:rPr lang="en-US" altLang="zh-CN" i="1"/>
+                                  <a:rPr lang="en-US" altLang="zh-CN" i="1">
+                                    <a:latin typeface="Cambria Math" panose="02040503050406030204" pitchFamily="18" charset="0"/>
+                                  </a:rPr>
                                   <m:t>𝑡</m:t>
                                 </m:r>
                               </m:sub>
@@ -5471,11 +7239,15 @@
                       </m:e>
                       <m:sub>
                         <m:r>
-                          <a:rPr lang="en-US" altLang="zh-CN" i="1"/>
+                          <a:rPr lang="en-US" altLang="zh-CN" i="1">
+                            <a:latin typeface="Cambria Math" panose="02040503050406030204" pitchFamily="18" charset="0"/>
+                          </a:rPr>
                           <m:t>𝑡</m:t>
                         </m:r>
                         <m:r>
-                          <a:rPr lang="zh-CN" altLang="zh-CN"/>
+                          <a:rPr lang="zh-CN" altLang="zh-CN">
+                            <a:latin typeface="Cambria Math" panose="02040503050406030204" pitchFamily="18" charset="0"/>
+                          </a:rPr>
                           <m:t>∈</m:t>
                         </m:r>
                         <m:d>
@@ -5483,25 +7255,33 @@
                             <m:begChr m:val="["/>
                             <m:endChr m:val="]"/>
                             <m:ctrlPr>
-                              <a:rPr lang="zh-CN" altLang="zh-CN" i="1"/>
+                              <a:rPr lang="zh-CN" altLang="zh-CN" i="1">
+                                <a:latin typeface="Cambria Math" panose="02040503050406030204" pitchFamily="18" charset="0"/>
+                              </a:rPr>
                             </m:ctrlPr>
                           </m:dPr>
                           <m:e>
                             <m:sSub>
                               <m:sSubPr>
                                 <m:ctrlPr>
-                                  <a:rPr lang="zh-CN" altLang="zh-CN" i="1"/>
+                                  <a:rPr lang="zh-CN" altLang="zh-CN" i="1">
+                                    <a:latin typeface="Cambria Math" panose="02040503050406030204" pitchFamily="18" charset="0"/>
+                                  </a:rPr>
                                 </m:ctrlPr>
                               </m:sSubPr>
                               <m:e>
                                 <m:r>
-                                  <a:rPr lang="en-US" altLang="zh-CN" i="1"/>
+                                  <a:rPr lang="en-US" altLang="zh-CN" i="1">
+                                    <a:latin typeface="Cambria Math" panose="02040503050406030204" pitchFamily="18" charset="0"/>
+                                  </a:rPr>
                                   <m:t>𝑇</m:t>
                                 </m:r>
                               </m:e>
                               <m:sub>
                                 <m:r>
-                                  <a:rPr lang="en-US" altLang="zh-CN" i="1"/>
+                                  <a:rPr lang="en-US" altLang="zh-CN" i="1">
+                                    <a:latin typeface="Cambria Math" panose="02040503050406030204" pitchFamily="18" charset="0"/>
+                                  </a:rPr>
                                   <m:t>0</m:t>
                                 </m:r>
                               </m:sub>
@@ -5523,34 +7303,46 @@
                 <a14:m>
                   <m:oMath xmlns:m="http://schemas.openxmlformats.org/officeDocument/2006/math">
                     <m:r>
-                      <a:rPr lang="en-US" altLang="zh-CN"/>
+                      <a:rPr lang="en-US" altLang="zh-CN">
+                        <a:latin typeface="Cambria Math" panose="02040503050406030204" pitchFamily="18" charset="0"/>
+                      </a:rPr>
                       <m:t>𝑡</m:t>
                     </m:r>
                     <m:r>
-                      <a:rPr lang="en-US" altLang="zh-CN"/>
+                      <a:rPr lang="en-US" altLang="zh-CN">
+                        <a:latin typeface="Cambria Math" panose="02040503050406030204" pitchFamily="18" charset="0"/>
+                      </a:rPr>
                       <m:t>=</m:t>
                     </m:r>
                     <m:sSub>
                       <m:sSubPr>
                         <m:ctrlPr>
-                          <a:rPr lang="zh-CN" altLang="zh-CN"/>
+                          <a:rPr lang="zh-CN" altLang="zh-CN" i="1">
+                            <a:latin typeface="Cambria Math" panose="02040503050406030204" pitchFamily="18" charset="0"/>
+                          </a:rPr>
                         </m:ctrlPr>
                       </m:sSubPr>
                       <m:e>
                         <m:r>
-                          <a:rPr lang="en-US" altLang="zh-CN"/>
+                          <a:rPr lang="en-US" altLang="zh-CN">
+                            <a:latin typeface="Cambria Math" panose="02040503050406030204" pitchFamily="18" charset="0"/>
+                          </a:rPr>
                           <m:t>𝑇</m:t>
                         </m:r>
                       </m:e>
                       <m:sub>
                         <m:r>
-                          <a:rPr lang="en-US" altLang="zh-CN"/>
+                          <a:rPr lang="en-US" altLang="zh-CN">
+                            <a:latin typeface="Cambria Math" panose="02040503050406030204" pitchFamily="18" charset="0"/>
+                          </a:rPr>
                           <m:t>0</m:t>
                         </m:r>
                       </m:sub>
                     </m:sSub>
                     <m:r>
-                      <a:rPr lang="en-US" altLang="zh-CN"/>
+                      <a:rPr lang="en-US" altLang="zh-CN">
+                        <a:latin typeface="Cambria Math" panose="02040503050406030204" pitchFamily="18" charset="0"/>
+                      </a:rPr>
                       <m:t>+1</m:t>
                     </m:r>
                   </m:oMath>
@@ -5585,7 +7377,9 @@
                     <m:sSub>
                       <m:sSubPr>
                         <m:ctrlPr>
-                          <a:rPr lang="zh-CN" altLang="zh-CN"/>
+                          <a:rPr lang="zh-CN" altLang="zh-CN" i="1">
+                            <a:latin typeface="Cambria Math" panose="02040503050406030204" pitchFamily="18" charset="0"/>
+                          </a:rPr>
                         </m:ctrlPr>
                       </m:sSubPr>
                       <m:e>
@@ -5593,12 +7387,16 @@
                           <m:accPr>
                             <m:chr m:val="̂"/>
                             <m:ctrlPr>
-                              <a:rPr lang="zh-CN" altLang="zh-CN"/>
+                              <a:rPr lang="zh-CN" altLang="zh-CN" i="1">
+                                <a:latin typeface="Cambria Math" panose="02040503050406030204" pitchFamily="18" charset="0"/>
+                              </a:rPr>
                             </m:ctrlPr>
                           </m:accPr>
                           <m:e>
                             <m:r>
-                              <a:rPr lang="en-US" altLang="zh-CN"/>
+                              <a:rPr lang="en-US" altLang="zh-CN">
+                                <a:latin typeface="Cambria Math" panose="02040503050406030204" pitchFamily="18" charset="0"/>
+                              </a:rPr>
                               <m:t>𝛉</m:t>
                             </m:r>
                           </m:e>
@@ -5606,15 +7404,21 @@
                       </m:e>
                       <m:sub>
                         <m:r>
-                          <a:rPr lang="en-US" altLang="zh-CN"/>
+                          <a:rPr lang="en-US" altLang="zh-CN">
+                            <a:latin typeface="Cambria Math" panose="02040503050406030204" pitchFamily="18" charset="0"/>
+                          </a:rPr>
                           <m:t>𝑡</m:t>
                         </m:r>
                         <m:r>
-                          <a:rPr lang="en-US" altLang="zh-CN"/>
+                          <a:rPr lang="en-US" altLang="zh-CN">
+                            <a:latin typeface="Cambria Math" panose="02040503050406030204" pitchFamily="18" charset="0"/>
+                          </a:rPr>
                           <m:t>−1,</m:t>
                         </m:r>
                         <m:r>
-                          <a:rPr lang="en-US" altLang="zh-CN"/>
+                          <a:rPr lang="en-US" altLang="zh-CN">
+                            <a:latin typeface="Cambria Math" panose="02040503050406030204" pitchFamily="18" charset="0"/>
+                          </a:rPr>
                           <m:t>𝑋</m:t>
                         </m:r>
                       </m:sub>
@@ -5628,7 +7432,9 @@
                 <a14:m>
                   <m:oMath xmlns:m="http://schemas.openxmlformats.org/officeDocument/2006/math">
                     <m:r>
-                      <a:rPr lang="en-US" altLang="zh-CN"/>
+                      <a:rPr lang="en-US" altLang="zh-CN">
+                        <a:latin typeface="Cambria Math" panose="02040503050406030204" pitchFamily="18" charset="0"/>
+                      </a:rPr>
                       <m:t>𝑋</m:t>
                     </m:r>
                   </m:oMath>
@@ -5642,26 +7448,34 @@
                     <m:sSub>
                       <m:sSubPr>
                         <m:ctrlPr>
-                          <a:rPr lang="zh-CN" altLang="zh-CN"/>
+                          <a:rPr lang="zh-CN" altLang="zh-CN" i="1">
+                            <a:latin typeface="Cambria Math" panose="02040503050406030204" pitchFamily="18" charset="0"/>
+                          </a:rPr>
                         </m:ctrlPr>
                       </m:sSubPr>
                       <m:e>
                         <m:d>
                           <m:dPr>
                             <m:ctrlPr>
-                              <a:rPr lang="zh-CN" altLang="zh-CN"/>
+                              <a:rPr lang="zh-CN" altLang="zh-CN" i="1">
+                                <a:latin typeface="Cambria Math" panose="02040503050406030204" pitchFamily="18" charset="0"/>
+                              </a:rPr>
                             </m:ctrlPr>
                           </m:dPr>
                           <m:e>
                             <m:sSub>
                               <m:sSubPr>
                                 <m:ctrlPr>
-                                  <a:rPr lang="zh-CN" altLang="zh-CN"/>
+                                  <a:rPr lang="zh-CN" altLang="zh-CN" i="1">
+                                    <a:latin typeface="Cambria Math" panose="02040503050406030204" pitchFamily="18" charset="0"/>
+                                  </a:rPr>
                                 </m:ctrlPr>
                               </m:sSubPr>
                               <m:e>
                                 <m:r>
-                                  <a:rPr lang="en-US" altLang="zh-CN"/>
+                                  <a:rPr lang="en-US" altLang="zh-CN">
+                                    <a:latin typeface="Cambria Math" panose="02040503050406030204" pitchFamily="18" charset="0"/>
+                                  </a:rPr>
                                   <m:t>𝑿</m:t>
                                 </m:r>
                               </m:e>
@@ -5669,18 +7483,24 @@
                                 <m:sSup>
                                   <m:sSupPr>
                                     <m:ctrlPr>
-                                      <a:rPr lang="zh-CN" altLang="zh-CN"/>
+                                      <a:rPr lang="zh-CN" altLang="zh-CN" i="1">
+                                        <a:latin typeface="Cambria Math" panose="02040503050406030204" pitchFamily="18" charset="0"/>
+                                      </a:rPr>
                                     </m:ctrlPr>
                                   </m:sSupPr>
                                   <m:e>
                                     <m:r>
-                                      <a:rPr lang="en-US" altLang="zh-CN"/>
+                                      <a:rPr lang="en-US" altLang="zh-CN">
+                                        <a:latin typeface="Cambria Math" panose="02040503050406030204" pitchFamily="18" charset="0"/>
+                                      </a:rPr>
                                       <m:t>𝑡</m:t>
                                     </m:r>
                                   </m:e>
                                   <m:sup>
                                     <m:r>
-                                      <a:rPr lang="en-US" altLang="zh-CN"/>
+                                      <a:rPr lang="en-US" altLang="zh-CN">
+                                        <a:latin typeface="Cambria Math" panose="02040503050406030204" pitchFamily="18" charset="0"/>
+                                      </a:rPr>
                                       <m:t>′</m:t>
                                     </m:r>
                                   </m:sup>
@@ -5688,18 +7508,24 @@
                               </m:sub>
                             </m:sSub>
                             <m:r>
-                              <a:rPr lang="en-US" altLang="zh-CN"/>
+                              <a:rPr lang="en-US" altLang="zh-CN">
+                                <a:latin typeface="Cambria Math" panose="02040503050406030204" pitchFamily="18" charset="0"/>
+                              </a:rPr>
                               <m:t>,</m:t>
                             </m:r>
                             <m:sSub>
                               <m:sSubPr>
                                 <m:ctrlPr>
-                                  <a:rPr lang="zh-CN" altLang="zh-CN"/>
+                                  <a:rPr lang="zh-CN" altLang="zh-CN" i="1">
+                                    <a:latin typeface="Cambria Math" panose="02040503050406030204" pitchFamily="18" charset="0"/>
+                                  </a:rPr>
                                 </m:ctrlPr>
                               </m:sSubPr>
                               <m:e>
                                 <m:r>
-                                  <a:rPr lang="en-US" altLang="zh-CN"/>
+                                  <a:rPr lang="en-US" altLang="zh-CN">
+                                    <a:latin typeface="Cambria Math" panose="02040503050406030204" pitchFamily="18" charset="0"/>
+                                  </a:rPr>
                                   <m:t>𝑌</m:t>
                                 </m:r>
                               </m:e>
@@ -5707,18 +7533,24 @@
                                 <m:sSup>
                                   <m:sSupPr>
                                     <m:ctrlPr>
-                                      <a:rPr lang="zh-CN" altLang="zh-CN"/>
+                                      <a:rPr lang="zh-CN" altLang="zh-CN" i="1">
+                                        <a:latin typeface="Cambria Math" panose="02040503050406030204" pitchFamily="18" charset="0"/>
+                                      </a:rPr>
                                     </m:ctrlPr>
                                   </m:sSupPr>
                                   <m:e>
                                     <m:r>
-                                      <a:rPr lang="en-US" altLang="zh-CN"/>
+                                      <a:rPr lang="en-US" altLang="zh-CN">
+                                        <a:latin typeface="Cambria Math" panose="02040503050406030204" pitchFamily="18" charset="0"/>
+                                      </a:rPr>
                                       <m:t>𝑡</m:t>
                                     </m:r>
                                   </m:e>
                                   <m:sup>
                                     <m:r>
-                                      <a:rPr lang="en-US" altLang="zh-CN"/>
+                                      <a:rPr lang="en-US" altLang="zh-CN">
+                                        <a:latin typeface="Cambria Math" panose="02040503050406030204" pitchFamily="18" charset="0"/>
+                                      </a:rPr>
                                       <m:t>′</m:t>
                                     </m:r>
                                   </m:sup>
@@ -5732,24 +7564,32 @@
                         <m:sSup>
                           <m:sSupPr>
                             <m:ctrlPr>
-                              <a:rPr lang="zh-CN" altLang="zh-CN"/>
+                              <a:rPr lang="zh-CN" altLang="zh-CN" i="1">
+                                <a:latin typeface="Cambria Math" panose="02040503050406030204" pitchFamily="18" charset="0"/>
+                              </a:rPr>
                             </m:ctrlPr>
                           </m:sSupPr>
                           <m:e>
                             <m:r>
-                              <a:rPr lang="en-US" altLang="zh-CN"/>
+                              <a:rPr lang="en-US" altLang="zh-CN">
+                                <a:latin typeface="Cambria Math" panose="02040503050406030204" pitchFamily="18" charset="0"/>
+                              </a:rPr>
                               <m:t>𝑡</m:t>
                             </m:r>
                           </m:e>
                           <m:sup>
                             <m:r>
-                              <a:rPr lang="en-US" altLang="zh-CN"/>
+                              <a:rPr lang="en-US" altLang="zh-CN">
+                                <a:latin typeface="Cambria Math" panose="02040503050406030204" pitchFamily="18" charset="0"/>
+                              </a:rPr>
                               <m:t>′</m:t>
                             </m:r>
                           </m:sup>
                         </m:sSup>
                         <m:r>
-                          <a:rPr lang="zh-CN" altLang="zh-CN"/>
+                          <a:rPr lang="zh-CN" altLang="zh-CN">
+                            <a:latin typeface="Cambria Math" panose="02040503050406030204" pitchFamily="18" charset="0"/>
+                          </a:rPr>
                           <m:t>∈</m:t>
                         </m:r>
                         <m:d>
@@ -5757,16 +7597,22 @@
                             <m:begChr m:val="["/>
                             <m:endChr m:val="]"/>
                             <m:ctrlPr>
-                              <a:rPr lang="zh-CN" altLang="zh-CN"/>
+                              <a:rPr lang="zh-CN" altLang="zh-CN" i="1">
+                                <a:latin typeface="Cambria Math" panose="02040503050406030204" pitchFamily="18" charset="0"/>
+                              </a:rPr>
                             </m:ctrlPr>
                           </m:dPr>
                           <m:e>
                             <m:r>
-                              <a:rPr lang="en-US" altLang="zh-CN"/>
+                              <a:rPr lang="en-US" altLang="zh-CN">
+                                <a:latin typeface="Cambria Math" panose="02040503050406030204" pitchFamily="18" charset="0"/>
+                              </a:rPr>
                               <m:t>𝑡</m:t>
                             </m:r>
                             <m:r>
-                              <a:rPr lang="en-US" altLang="zh-CN"/>
+                              <a:rPr lang="en-US" altLang="zh-CN">
+                                <a:latin typeface="Cambria Math" panose="02040503050406030204" pitchFamily="18" charset="0"/>
+                              </a:rPr>
                               <m:t>−1</m:t>
                             </m:r>
                           </m:e>
@@ -5788,26 +7634,36 @@
                     <m:sSub>
                       <m:sSubPr>
                         <m:ctrlPr>
-                          <a:rPr lang="zh-CN" altLang="zh-CN"/>
+                          <a:rPr lang="zh-CN" altLang="zh-CN" i="1">
+                            <a:latin typeface="Cambria Math" panose="02040503050406030204" pitchFamily="18" charset="0"/>
+                          </a:rPr>
                         </m:ctrlPr>
                       </m:sSubPr>
                       <m:e>
                         <m:r>
-                          <a:rPr lang="en-US" altLang="zh-CN"/>
+                          <a:rPr lang="en-US" altLang="zh-CN">
+                            <a:latin typeface="Cambria Math" panose="02040503050406030204" pitchFamily="18" charset="0"/>
+                          </a:rPr>
                           <m:t>𝒞</m:t>
                         </m:r>
                       </m:e>
                       <m:sub>
                         <m:r>
-                          <a:rPr lang="en-US" altLang="zh-CN"/>
+                          <a:rPr lang="en-US" altLang="zh-CN">
+                            <a:latin typeface="Cambria Math" panose="02040503050406030204" pitchFamily="18" charset="0"/>
+                          </a:rPr>
                           <m:t>𝑡</m:t>
                         </m:r>
                         <m:r>
-                          <a:rPr lang="en-US" altLang="zh-CN"/>
+                          <a:rPr lang="en-US" altLang="zh-CN">
+                            <a:latin typeface="Cambria Math" panose="02040503050406030204" pitchFamily="18" charset="0"/>
+                          </a:rPr>
                           <m:t>,</m:t>
                         </m:r>
                         <m:r>
-                          <a:rPr lang="en-US" altLang="zh-CN"/>
+                          <a:rPr lang="en-US" altLang="zh-CN">
+                            <a:latin typeface="Cambria Math" panose="02040503050406030204" pitchFamily="18" charset="0"/>
+                          </a:rPr>
                           <m:t>𝑋</m:t>
                         </m:r>
                       </m:sub>
@@ -5897,37 +7753,49 @@
                     <m:d>
                       <m:dPr>
                         <m:ctrlPr>
-                          <a:rPr lang="zh-CN" altLang="zh-CN"/>
+                          <a:rPr lang="zh-CN" altLang="zh-CN" i="1">
+                            <a:latin typeface="Cambria Math" panose="02040503050406030204" pitchFamily="18" charset="0"/>
+                          </a:rPr>
                         </m:ctrlPr>
                       </m:dPr>
                       <m:e>
                         <m:sSub>
                           <m:sSubPr>
                             <m:ctrlPr>
-                              <a:rPr lang="zh-CN" altLang="zh-CN"/>
+                              <a:rPr lang="zh-CN" altLang="zh-CN" i="1">
+                                <a:latin typeface="Cambria Math" panose="02040503050406030204" pitchFamily="18" charset="0"/>
+                              </a:rPr>
                             </m:ctrlPr>
                           </m:sSubPr>
                           <m:e>
                             <m:r>
-                              <a:rPr lang="en-US" altLang="zh-CN" b="1" i="1"/>
+                              <a:rPr lang="en-US" altLang="zh-CN" b="1" i="1">
+                                <a:latin typeface="Cambria Math" panose="02040503050406030204" pitchFamily="18" charset="0"/>
+                              </a:rPr>
                               <m:t>𝐒</m:t>
                             </m:r>
                           </m:e>
                           <m:sub>
                             <m:r>
-                              <a:rPr lang="en-US" altLang="zh-CN"/>
+                              <a:rPr lang="en-US" altLang="zh-CN">
+                                <a:latin typeface="Cambria Math" panose="02040503050406030204" pitchFamily="18" charset="0"/>
+                              </a:rPr>
                               <m:t>𝑡</m:t>
                             </m:r>
                           </m:sub>
                         </m:sSub>
                         <m:r>
-                          <a:rPr lang="en-US" altLang="zh-CN"/>
+                          <a:rPr lang="en-US" altLang="zh-CN">
+                            <a:latin typeface="Cambria Math" panose="02040503050406030204" pitchFamily="18" charset="0"/>
+                          </a:rPr>
                           <m:t>,</m:t>
                         </m:r>
                         <m:sSub>
                           <m:sSubPr>
                             <m:ctrlPr>
-                              <a:rPr lang="zh-CN" altLang="zh-CN"/>
+                              <a:rPr lang="zh-CN" altLang="zh-CN" i="1">
+                                <a:latin typeface="Cambria Math" panose="02040503050406030204" pitchFamily="18" charset="0"/>
+                              </a:rPr>
                             </m:ctrlPr>
                           </m:sSubPr>
                           <m:e>
@@ -5935,12 +7803,16 @@
                               <m:accPr>
                                 <m:chr m:val="̃"/>
                                 <m:ctrlPr>
-                                  <a:rPr lang="zh-CN" altLang="zh-CN"/>
+                                  <a:rPr lang="zh-CN" altLang="zh-CN" i="1">
+                                    <a:latin typeface="Cambria Math" panose="02040503050406030204" pitchFamily="18" charset="0"/>
+                                  </a:rPr>
                                 </m:ctrlPr>
                               </m:accPr>
                               <m:e>
                                 <m:r>
-                                  <a:rPr lang="en-US" altLang="zh-CN" b="1" i="1"/>
+                                  <a:rPr lang="en-US" altLang="zh-CN" b="1" i="1">
+                                    <a:latin typeface="Cambria Math" panose="02040503050406030204" pitchFamily="18" charset="0"/>
+                                  </a:rPr>
                                   <m:t>𝛉</m:t>
                                 </m:r>
                               </m:e>
@@ -5948,7 +7820,9 @@
                           </m:e>
                           <m:sub>
                             <m:r>
-                              <a:rPr lang="en-US" altLang="zh-CN"/>
+                              <a:rPr lang="en-US" altLang="zh-CN">
+                                <a:latin typeface="Cambria Math" panose="02040503050406030204" pitchFamily="18" charset="0"/>
+                              </a:rPr>
                               <m:t>𝑡</m:t>
                             </m:r>
                           </m:sub>
@@ -5956,20 +7830,26 @@
                       </m:e>
                     </m:d>
                     <m:r>
-                      <a:rPr lang="en-US" altLang="zh-CN"/>
+                      <a:rPr lang="en-US" altLang="zh-CN">
+                        <a:latin typeface="Cambria Math" panose="02040503050406030204" pitchFamily="18" charset="0"/>
+                      </a:rPr>
                       <m:t>=</m:t>
                     </m:r>
                     <m:r>
                       <m:rPr>
                         <m:sty m:val="p"/>
                       </m:rPr>
-                      <a:rPr lang="en-US" altLang="zh-CN" i="0"/>
+                      <a:rPr lang="en-US" altLang="zh-CN" i="0">
+                        <a:latin typeface="Cambria Math" panose="02040503050406030204" pitchFamily="18" charset="0"/>
+                      </a:rPr>
                       <m:t>argma</m:t>
                     </m:r>
                     <m:sSub>
                       <m:sSubPr>
                         <m:ctrlPr>
-                          <a:rPr lang="zh-CN" altLang="zh-CN"/>
+                          <a:rPr lang="zh-CN" altLang="zh-CN" i="1">
+                            <a:latin typeface="Cambria Math" panose="02040503050406030204" pitchFamily="18" charset="0"/>
+                          </a:rPr>
                         </m:ctrlPr>
                       </m:sSubPr>
                       <m:e>
@@ -5977,25 +7857,35 @@
                           <m:rPr>
                             <m:sty m:val="p"/>
                           </m:rPr>
-                          <a:rPr lang="en-US" altLang="zh-CN" i="0"/>
+                          <a:rPr lang="en-US" altLang="zh-CN" i="0">
+                            <a:latin typeface="Cambria Math" panose="02040503050406030204" pitchFamily="18" charset="0"/>
+                          </a:rPr>
                           <m:t>x</m:t>
                         </m:r>
                       </m:e>
                       <m:sub>
                         <m:r>
-                          <a:rPr lang="en-US" altLang="zh-CN" b="1" i="1"/>
+                          <a:rPr lang="en-US" altLang="zh-CN" b="1" i="1">
+                            <a:latin typeface="Cambria Math" panose="02040503050406030204" pitchFamily="18" charset="0"/>
+                          </a:rPr>
                           <m:t>𝐒</m:t>
                         </m:r>
                         <m:r>
-                          <a:rPr lang="en-US" altLang="zh-CN"/>
+                          <a:rPr lang="en-US" altLang="zh-CN">
+                            <a:latin typeface="Cambria Math" panose="02040503050406030204" pitchFamily="18" charset="0"/>
+                          </a:rPr>
                           <m:t>⊆</m:t>
                         </m:r>
                         <m:r>
-                          <a:rPr lang="en-US" altLang="zh-CN" b="1" i="1"/>
+                          <a:rPr lang="en-US" altLang="zh-CN" b="1" i="1">
+                            <a:latin typeface="Cambria Math" panose="02040503050406030204" pitchFamily="18" charset="0"/>
+                          </a:rPr>
                           <m:t>𝐗</m:t>
                         </m:r>
                         <m:r>
-                          <a:rPr lang="en-US" altLang="zh-CN"/>
+                          <a:rPr lang="en-US" altLang="zh-CN">
+                            <a:latin typeface="Cambria Math" panose="02040503050406030204" pitchFamily="18" charset="0"/>
+                          </a:rPr>
                           <m:t>,</m:t>
                         </m:r>
                         <m:d>
@@ -6003,88 +7893,122 @@
                             <m:begChr m:val="|"/>
                             <m:endChr m:val="|"/>
                             <m:ctrlPr>
-                              <a:rPr lang="zh-CN" altLang="zh-CN"/>
+                              <a:rPr lang="zh-CN" altLang="zh-CN" i="1">
+                                <a:latin typeface="Cambria Math" panose="02040503050406030204" pitchFamily="18" charset="0"/>
+                              </a:rPr>
                             </m:ctrlPr>
                           </m:dPr>
                           <m:e>
                             <m:r>
-                              <a:rPr lang="en-US" altLang="zh-CN" b="1" i="1"/>
+                              <a:rPr lang="en-US" altLang="zh-CN" b="1" i="1">
+                                <a:latin typeface="Cambria Math" panose="02040503050406030204" pitchFamily="18" charset="0"/>
+                              </a:rPr>
                               <m:t>𝐒</m:t>
                             </m:r>
                           </m:e>
                         </m:d>
                         <m:r>
-                          <a:rPr lang="zh-CN" altLang="zh-CN"/>
+                          <a:rPr lang="zh-CN" altLang="zh-CN">
+                            <a:latin typeface="Cambria Math" panose="02040503050406030204" pitchFamily="18" charset="0"/>
+                          </a:rPr>
                           <m:t>≤</m:t>
                         </m:r>
                         <m:r>
-                          <a:rPr lang="en-US" altLang="zh-CN"/>
+                          <a:rPr lang="en-US" altLang="zh-CN">
+                            <a:latin typeface="Cambria Math" panose="02040503050406030204" pitchFamily="18" charset="0"/>
+                          </a:rPr>
                           <m:t>𝐾</m:t>
                         </m:r>
                         <m:r>
-                          <a:rPr lang="en-US" altLang="zh-CN"/>
+                          <a:rPr lang="en-US" altLang="zh-CN">
+                            <a:latin typeface="Cambria Math" panose="02040503050406030204" pitchFamily="18" charset="0"/>
+                          </a:rPr>
                           <m:t>,</m:t>
                         </m:r>
                         <m:sSubSup>
                           <m:sSubSupPr>
                             <m:ctrlPr>
-                              <a:rPr lang="zh-CN" altLang="zh-CN"/>
+                              <a:rPr lang="zh-CN" altLang="zh-CN" i="1">
+                                <a:latin typeface="Cambria Math" panose="02040503050406030204" pitchFamily="18" charset="0"/>
+                              </a:rPr>
                             </m:ctrlPr>
                           </m:sSubSupPr>
                           <m:e>
                             <m:r>
-                              <a:rPr lang="en-US" altLang="zh-CN" b="1" i="1"/>
+                              <a:rPr lang="en-US" altLang="zh-CN" b="1" i="1">
+                                <a:latin typeface="Cambria Math" panose="02040503050406030204" pitchFamily="18" charset="0"/>
+                              </a:rPr>
                               <m:t>𝛉</m:t>
                             </m:r>
                           </m:e>
                           <m:sub>
                             <m:r>
-                              <a:rPr lang="en-US" altLang="zh-CN"/>
+                              <a:rPr lang="en-US" altLang="zh-CN">
+                                <a:latin typeface="Cambria Math" panose="02040503050406030204" pitchFamily="18" charset="0"/>
+                              </a:rPr>
                               <m:t>𝑡</m:t>
                             </m:r>
                             <m:r>
-                              <a:rPr lang="en-US" altLang="zh-CN"/>
+                              <a:rPr lang="en-US" altLang="zh-CN">
+                                <a:latin typeface="Cambria Math" panose="02040503050406030204" pitchFamily="18" charset="0"/>
+                              </a:rPr>
                               <m:t>,</m:t>
                             </m:r>
                             <m:r>
-                              <a:rPr lang="en-US" altLang="zh-CN"/>
+                              <a:rPr lang="en-US" altLang="zh-CN">
+                                <a:latin typeface="Cambria Math" panose="02040503050406030204" pitchFamily="18" charset="0"/>
+                              </a:rPr>
                               <m:t>𝑋</m:t>
                             </m:r>
                           </m:sub>
                           <m:sup>
                             <m:r>
-                              <a:rPr lang="en-US" altLang="zh-CN"/>
+                              <a:rPr lang="en-US" altLang="zh-CN">
+                                <a:latin typeface="Cambria Math" panose="02040503050406030204" pitchFamily="18" charset="0"/>
+                              </a:rPr>
                               <m:t>′</m:t>
                             </m:r>
                           </m:sup>
                         </m:sSubSup>
                         <m:r>
-                          <a:rPr lang="zh-CN" altLang="zh-CN"/>
+                          <a:rPr lang="zh-CN" altLang="zh-CN">
+                            <a:latin typeface="Cambria Math" panose="02040503050406030204" pitchFamily="18" charset="0"/>
+                          </a:rPr>
                           <m:t>∈</m:t>
                         </m:r>
                         <m:sSub>
                           <m:sSubPr>
                             <m:ctrlPr>
-                              <a:rPr lang="zh-CN" altLang="zh-CN"/>
+                              <a:rPr lang="zh-CN" altLang="zh-CN" i="1">
+                                <a:latin typeface="Cambria Math" panose="02040503050406030204" pitchFamily="18" charset="0"/>
+                              </a:rPr>
                             </m:ctrlPr>
                           </m:sSubPr>
                           <m:e>
                             <m:r>
-                              <a:rPr lang="en-US" altLang="zh-CN"/>
+                              <a:rPr lang="en-US" altLang="zh-CN">
+                                <a:latin typeface="Cambria Math" panose="02040503050406030204" pitchFamily="18" charset="0"/>
+                              </a:rPr>
                               <m:t>𝒞</m:t>
                             </m:r>
                           </m:e>
                           <m:sub>
                             <m:r>
-                              <a:rPr lang="en-US" altLang="zh-CN"/>
+                              <a:rPr lang="en-US" altLang="zh-CN">
+                                <a:latin typeface="Cambria Math" panose="02040503050406030204" pitchFamily="18" charset="0"/>
+                              </a:rPr>
                               <m:t>𝑡</m:t>
                             </m:r>
                             <m:r>
-                              <a:rPr lang="en-US" altLang="zh-CN"/>
+                              <a:rPr lang="en-US" altLang="zh-CN">
+                                <a:latin typeface="Cambria Math" panose="02040503050406030204" pitchFamily="18" charset="0"/>
+                              </a:rPr>
                               <m:t>,</m:t>
                             </m:r>
                             <m:r>
-                              <a:rPr lang="en-US" altLang="zh-CN"/>
+                              <a:rPr lang="en-US" altLang="zh-CN">
+                                <a:latin typeface="Cambria Math" panose="02040503050406030204" pitchFamily="18" charset="0"/>
+                              </a:rPr>
                               <m:t>𝑋</m:t>
                             </m:r>
                           </m:sub>
@@ -6092,7 +8016,9 @@
                       </m:sub>
                     </m:sSub>
                     <m:r>
-                      <a:rPr lang="en-US" altLang="zh-CN"/>
+                      <a:rPr lang="en-US" altLang="zh-CN">
+                        <a:latin typeface="Cambria Math" panose="02040503050406030204" pitchFamily="18" charset="0"/>
+                      </a:rPr>
                       <m:t>𝔼</m:t>
                     </m:r>
                     <m:d>
@@ -6100,29 +8026,39 @@
                         <m:begChr m:val="["/>
                         <m:endChr m:val="]"/>
                         <m:ctrlPr>
-                          <a:rPr lang="zh-CN" altLang="zh-CN"/>
+                          <a:rPr lang="zh-CN" altLang="zh-CN" i="1">
+                            <a:latin typeface="Cambria Math" panose="02040503050406030204" pitchFamily="18" charset="0"/>
+                          </a:rPr>
                         </m:ctrlPr>
                       </m:dPr>
                       <m:e>
                         <m:r>
-                          <a:rPr lang="en-US" altLang="zh-CN"/>
+                          <a:rPr lang="en-US" altLang="zh-CN">
+                            <a:latin typeface="Cambria Math" panose="02040503050406030204" pitchFamily="18" charset="0"/>
+                          </a:rPr>
                           <m:t>𝑌</m:t>
                         </m:r>
                       </m:e>
                       <m:e>
                         <m:r>
-                          <a:rPr lang="en-US" altLang="zh-CN"/>
+                          <a:rPr lang="en-US" altLang="zh-CN">
+                            <a:latin typeface="Cambria Math" panose="02040503050406030204" pitchFamily="18" charset="0"/>
+                          </a:rPr>
                           <m:t>𝑑𝑜</m:t>
                         </m:r>
                         <m:d>
                           <m:dPr>
                             <m:ctrlPr>
-                              <a:rPr lang="zh-CN" altLang="zh-CN"/>
+                              <a:rPr lang="zh-CN" altLang="zh-CN" i="1">
+                                <a:latin typeface="Cambria Math" panose="02040503050406030204" pitchFamily="18" charset="0"/>
+                              </a:rPr>
                             </m:ctrlPr>
                           </m:dPr>
                           <m:e>
                             <m:r>
-                              <a:rPr lang="en-US" altLang="zh-CN" b="1" i="1"/>
+                              <a:rPr lang="en-US" altLang="zh-CN" b="1" i="1">
+                                <a:latin typeface="Cambria Math" panose="02040503050406030204" pitchFamily="18" charset="0"/>
+                              </a:rPr>
                               <m:t>𝐒</m:t>
                             </m:r>
                           </m:e>
@@ -6144,18 +8080,24 @@
                     <m:sSub>
                       <m:sSubPr>
                         <m:ctrlPr>
-                          <a:rPr lang="zh-CN" altLang="zh-CN" i="1"/>
+                          <a:rPr lang="zh-CN" altLang="zh-CN" i="1">
+                            <a:latin typeface="Cambria Math" panose="02040503050406030204" pitchFamily="18" charset="0"/>
+                          </a:rPr>
                         </m:ctrlPr>
                       </m:sSubPr>
                       <m:e>
                         <m:r>
-                          <a:rPr lang="en-US" altLang="zh-CN" b="1" i="0"/>
+                          <a:rPr lang="en-US" altLang="zh-CN" b="1" i="0">
+                            <a:latin typeface="Cambria Math" panose="02040503050406030204" pitchFamily="18" charset="0"/>
+                          </a:rPr>
                           <m:t>𝐒</m:t>
                         </m:r>
                       </m:e>
                       <m:sub>
                         <m:r>
-                          <a:rPr lang="en-US" altLang="zh-CN" i="1"/>
+                          <a:rPr lang="en-US" altLang="zh-CN" i="1">
+                            <a:latin typeface="Cambria Math" panose="02040503050406030204" pitchFamily="18" charset="0"/>
+                          </a:rPr>
                           <m:t>𝑡</m:t>
                         </m:r>
                       </m:sub>
@@ -6268,7 +8210,7 @@
             </p:txBody>
           </p:sp>
         </mc:Choice>
-        <mc:Fallback>
+        <mc:Fallback xmlns="">
           <p:sp>
             <p:nvSpPr>
               <p:cNvPr id="2" name="Content Placeholder 3">
@@ -6291,7 +8233,7 @@
                 <a:ext cx="10521388" cy="4213166"/>
               </a:xfrm>
               <a:blipFill>
-                <a:blip r:embed="rId2"/>
+                <a:blip r:embed="rId5"/>
                 <a:stretch>
                   <a:fillRect l="-463" t="-1737"/>
                 </a:stretch>
@@ -6322,6 +8264,14 @@
   <p:clrMapOvr>
     <a:masterClrMapping/>
   </p:clrMapOvr>
+  <mc:AlternateContent xmlns:mc="http://schemas.openxmlformats.org/markup-compatibility/2006" xmlns:p14="http://schemas.microsoft.com/office/powerpoint/2010/main">
+    <mc:Choice Requires="p14">
+      <p:transition spd="slow" p14:dur="2000" advTm="74625"/>
+    </mc:Choice>
+    <mc:Fallback xmlns="">
+      <p:transition spd="slow" advTm="74625"/>
+    </mc:Fallback>
+  </mc:AlternateContent>
 </p:sld>
 </file>
 
@@ -6376,8 +8326,8 @@
           </a:p>
         </p:txBody>
       </p:sp>
-      <mc:AlternateContent xmlns:mc="http://schemas.openxmlformats.org/markup-compatibility/2006">
-        <mc:Choice xmlns:a14="http://schemas.microsoft.com/office/drawing/2010/main" Requires="a14">
+      <mc:AlternateContent xmlns:mc="http://schemas.openxmlformats.org/markup-compatibility/2006" xmlns:a14="http://schemas.microsoft.com/office/drawing/2010/main">
+        <mc:Choice Requires="a14">
           <p:sp>
             <p:nvSpPr>
               <p:cNvPr id="2" name="Content Placeholder 3">
@@ -6654,7 +8604,9 @@
                 <a14:m>
                   <m:oMath xmlns:m="http://schemas.openxmlformats.org/officeDocument/2006/math">
                     <m:r>
-                      <a:rPr lang="en-US" altLang="zh-CN" sz="1800"/>
+                      <a:rPr lang="en-US" altLang="zh-CN" sz="1800">
+                        <a:latin typeface="Cambria Math" panose="02040503050406030204" pitchFamily="18" charset="0"/>
+                      </a:rPr>
                       <m:t>𝑛</m:t>
                     </m:r>
                   </m:oMath>
@@ -6672,7 +8624,9 @@
                       <m:rPr>
                         <m:sty m:val="p"/>
                       </m:rPr>
-                      <a:rPr lang="en-US" altLang="zh-CN" sz="1800"/>
+                      <a:rPr lang="en-US" altLang="zh-CN" sz="1800">
+                        <a:latin typeface="Cambria Math" panose="02040503050406030204" pitchFamily="18" charset="0"/>
+                      </a:rPr>
                       <m:t>κ</m:t>
                     </m:r>
                   </m:oMath>
@@ -6686,18 +8640,24 @@
                     <m:sSub>
                       <m:sSubPr>
                         <m:ctrlPr>
-                          <a:rPr lang="zh-CN" altLang="zh-CN" sz="1800"/>
+                          <a:rPr lang="zh-CN" altLang="zh-CN" sz="1800" i="1">
+                            <a:latin typeface="Cambria Math" panose="02040503050406030204" pitchFamily="18" charset="0"/>
+                          </a:rPr>
                         </m:ctrlPr>
                       </m:sSubPr>
                       <m:e>
                         <m:r>
-                          <a:rPr lang="en-US" altLang="zh-CN" sz="1800"/>
+                          <a:rPr lang="en-US" altLang="zh-CN" sz="1800">
+                            <a:latin typeface="Cambria Math" panose="02040503050406030204" pitchFamily="18" charset="0"/>
+                          </a:rPr>
                           <m:t>𝑓</m:t>
                         </m:r>
                       </m:e>
                       <m:sub>
                         <m:r>
-                          <a:rPr lang="en-US" altLang="zh-CN" sz="1800"/>
+                          <a:rPr lang="en-US" altLang="zh-CN" sz="1800">
+                            <a:latin typeface="Cambria Math" panose="02040503050406030204" pitchFamily="18" charset="0"/>
+                          </a:rPr>
                           <m:t>𝑋</m:t>
                         </m:r>
                       </m:sub>
@@ -6716,18 +8676,24 @@
                     <m:sSubSup>
                       <m:sSubSupPr>
                         <m:ctrlPr>
-                          <a:rPr lang="zh-CN" altLang="zh-CN" sz="1800"/>
+                          <a:rPr lang="zh-CN" altLang="zh-CN" sz="1800" i="1">
+                            <a:latin typeface="Cambria Math" panose="02040503050406030204" pitchFamily="18" charset="0"/>
+                          </a:rPr>
                         </m:ctrlPr>
                       </m:sSubSupPr>
                       <m:e>
                         <m:r>
-                          <a:rPr lang="en-US" altLang="zh-CN" sz="1800"/>
+                          <a:rPr lang="en-US" altLang="zh-CN" sz="1800">
+                            <a:latin typeface="Cambria Math" panose="02040503050406030204" pitchFamily="18" charset="0"/>
+                          </a:rPr>
                           <m:t>𝐿</m:t>
                         </m:r>
                       </m:e>
                       <m:sub>
                         <m:r>
-                          <a:rPr lang="en-US" altLang="zh-CN" sz="1800"/>
+                          <a:rPr lang="en-US" altLang="zh-CN" sz="1800">
+                            <a:latin typeface="Cambria Math" panose="02040503050406030204" pitchFamily="18" charset="0"/>
+                          </a:rPr>
                           <m:t>𝑚𝑎𝑥</m:t>
                         </m:r>
                       </m:sub>
@@ -6735,12 +8701,16 @@
                         <m:d>
                           <m:dPr>
                             <m:ctrlPr>
-                              <a:rPr lang="zh-CN" altLang="zh-CN" sz="1800"/>
+                              <a:rPr lang="zh-CN" altLang="zh-CN" sz="1800" i="1">
+                                <a:latin typeface="Cambria Math" panose="02040503050406030204" pitchFamily="18" charset="0"/>
+                              </a:rPr>
                             </m:ctrlPr>
                           </m:dPr>
                           <m:e>
                             <m:r>
-                              <a:rPr lang="en-US" altLang="zh-CN" sz="1800"/>
+                              <a:rPr lang="en-US" altLang="zh-CN" sz="1800">
+                                <a:latin typeface="Cambria Math" panose="02040503050406030204" pitchFamily="18" charset="0"/>
+                              </a:rPr>
                               <m:t>1</m:t>
                             </m:r>
                           </m:e>
@@ -6758,18 +8728,24 @@
                     <m:sSub>
                       <m:sSubPr>
                         <m:ctrlPr>
-                          <a:rPr lang="zh-CN" altLang="zh-CN" sz="1800"/>
+                          <a:rPr lang="zh-CN" altLang="zh-CN" sz="1800" i="1">
+                            <a:latin typeface="Cambria Math" panose="02040503050406030204" pitchFamily="18" charset="0"/>
+                          </a:rPr>
                         </m:ctrlPr>
                       </m:sSubPr>
                       <m:e>
                         <m:r>
-                          <a:rPr lang="en-US" altLang="zh-CN" sz="1800"/>
+                          <a:rPr lang="en-US" altLang="zh-CN" sz="1800">
+                            <a:latin typeface="Cambria Math" panose="02040503050406030204" pitchFamily="18" charset="0"/>
+                          </a:rPr>
                           <m:t>𝑓</m:t>
                         </m:r>
                       </m:e>
                       <m:sub>
                         <m:r>
-                          <a:rPr lang="en-US" altLang="zh-CN" sz="1800"/>
+                          <a:rPr lang="en-US" altLang="zh-CN" sz="1800">
+                            <a:latin typeface="Cambria Math" panose="02040503050406030204" pitchFamily="18" charset="0"/>
+                          </a:rPr>
                           <m:t>𝑋</m:t>
                         </m:r>
                       </m:sub>
@@ -6817,10 +8793,11 @@
                       <m:accPr>
                         <m:chr m:val="̃"/>
                         <m:ctrlPr>
-                          <a:rPr lang="zh-CN" altLang="zh-CN" sz="1800">
+                          <a:rPr lang="zh-CN" altLang="zh-CN" sz="1800" i="1">
                             <a:solidFill>
                               <a:schemeClr val="accent1"/>
                             </a:solidFill>
+                            <a:latin typeface="Cambria Math" panose="02040503050406030204" pitchFamily="18" charset="0"/>
                           </a:rPr>
                         </m:ctrlPr>
                       </m:accPr>
@@ -6830,6 +8807,7 @@
                             <a:solidFill>
                               <a:schemeClr val="accent1"/>
                             </a:solidFill>
+                            <a:latin typeface="Cambria Math" panose="02040503050406030204" pitchFamily="18" charset="0"/>
                           </a:rPr>
                           <m:t>𝑂</m:t>
                         </m:r>
@@ -6838,10 +8816,11 @@
                     <m:d>
                       <m:dPr>
                         <m:ctrlPr>
-                          <a:rPr lang="zh-CN" altLang="zh-CN" sz="1800">
+                          <a:rPr lang="zh-CN" altLang="zh-CN" sz="1800" i="1">
                             <a:solidFill>
                               <a:schemeClr val="accent1"/>
                             </a:solidFill>
+                            <a:latin typeface="Cambria Math" panose="02040503050406030204" pitchFamily="18" charset="0"/>
                           </a:rPr>
                         </m:ctrlPr>
                       </m:dPr>
@@ -6850,10 +8829,11 @@
                           <m:radPr>
                             <m:degHide m:val="on"/>
                             <m:ctrlPr>
-                              <a:rPr lang="zh-CN" altLang="zh-CN" sz="1800">
+                              <a:rPr lang="zh-CN" altLang="zh-CN" sz="1800" i="1">
                                 <a:solidFill>
                                   <a:schemeClr val="accent1"/>
                                 </a:solidFill>
+                                <a:latin typeface="Cambria Math" panose="02040503050406030204" pitchFamily="18" charset="0"/>
                               </a:rPr>
                             </m:ctrlPr>
                           </m:radPr>
@@ -6864,6 +8844,7 @@
                                 <a:solidFill>
                                   <a:schemeClr val="accent1"/>
                                 </a:solidFill>
+                                <a:latin typeface="Cambria Math" panose="02040503050406030204" pitchFamily="18" charset="0"/>
                               </a:rPr>
                               <m:t>𝑇</m:t>
                             </m:r>
@@ -6888,6 +8869,7 @@
                         <a:solidFill>
                           <a:schemeClr val="accent1"/>
                         </a:solidFill>
+                        <a:latin typeface="Cambria Math" panose="02040503050406030204" pitchFamily="18" charset="0"/>
                       </a:rPr>
                       <m:t>𝑇</m:t>
                     </m:r>
@@ -6943,7 +8925,7 @@
             </p:txBody>
           </p:sp>
         </mc:Choice>
-        <mc:Fallback>
+        <mc:Fallback xmlns="">
           <p:sp>
             <p:nvSpPr>
               <p:cNvPr id="2" name="Content Placeholder 3">
@@ -6966,7 +8948,7 @@
                 <a:ext cx="10521388" cy="4213166"/>
               </a:xfrm>
               <a:blipFill>
-                <a:blip r:embed="rId2"/>
+                <a:blip r:embed="rId5"/>
                 <a:stretch>
                   <a:fillRect l="-579"/>
                 </a:stretch>
@@ -6997,6 +8979,14 @@
   <p:clrMapOvr>
     <a:masterClrMapping/>
   </p:clrMapOvr>
+  <mc:AlternateContent xmlns:mc="http://schemas.openxmlformats.org/markup-compatibility/2006" xmlns:p14="http://schemas.microsoft.com/office/powerpoint/2010/main">
+    <mc:Choice Requires="p14">
+      <p:transition spd="slow" p14:dur="2000" advTm="60101"/>
+    </mc:Choice>
+    <mc:Fallback xmlns="">
+      <p:transition spd="slow" advTm="60101"/>
+    </mc:Fallback>
+  </mc:AlternateContent>
 </p:sld>
 </file>
 
@@ -7122,6 +9112,14 @@
   <p:clrMapOvr>
     <a:masterClrMapping/>
   </p:clrMapOvr>
+  <mc:AlternateContent xmlns:mc="http://schemas.openxmlformats.org/markup-compatibility/2006" xmlns:p14="http://schemas.microsoft.com/office/powerpoint/2010/main">
+    <mc:Choice Requires="p14">
+      <p:transition spd="slow" p14:dur="2000" advTm="4989"/>
+    </mc:Choice>
+    <mc:Fallback xmlns="">
+      <p:transition spd="slow" advTm="4989"/>
+    </mc:Fallback>
+  </mc:AlternateContent>
 </p:sld>
 </file>
 
@@ -7176,8 +9174,8 @@
           </a:p>
         </p:txBody>
       </p:sp>
-      <mc:AlternateContent xmlns:mc="http://schemas.openxmlformats.org/markup-compatibility/2006">
-        <mc:Choice xmlns:a14="http://schemas.microsoft.com/office/drawing/2010/main" Requires="a14">
+      <mc:AlternateContent xmlns:mc="http://schemas.openxmlformats.org/markup-compatibility/2006" xmlns:a14="http://schemas.microsoft.com/office/drawing/2010/main">
+        <mc:Choice Requires="a14">
           <p:sp>
             <p:nvSpPr>
               <p:cNvPr id="2" name="Content Placeholder 3">
@@ -7292,7 +9290,7 @@
             </p:txBody>
           </p:sp>
         </mc:Choice>
-        <mc:Fallback>
+        <mc:Fallback xmlns="">
           <p:sp>
             <p:nvSpPr>
               <p:cNvPr id="2" name="Content Placeholder 3">
@@ -7315,7 +9313,7 @@
                 <a:ext cx="10521388" cy="4213166"/>
               </a:xfrm>
               <a:blipFill>
-                <a:blip r:embed="rId2"/>
+                <a:blip r:embed="rId5"/>
                 <a:stretch>
                   <a:fillRect l="-579" t="-1158"/>
                 </a:stretch>
@@ -7346,6 +9344,14 @@
   <p:clrMapOvr>
     <a:masterClrMapping/>
   </p:clrMapOvr>
+  <mc:AlternateContent xmlns:mc="http://schemas.openxmlformats.org/markup-compatibility/2006" xmlns:p14="http://schemas.microsoft.com/office/powerpoint/2010/main">
+    <mc:Choice Requires="p14">
+      <p:transition spd="slow" p14:dur="2000" advTm="64741"/>
+    </mc:Choice>
+    <mc:Fallback xmlns="">
+      <p:transition spd="slow" advTm="64741"/>
+    </mc:Fallback>
+  </mc:AlternateContent>
 </p:sld>
 </file>
 
@@ -7471,6 +9477,14 @@
   <p:clrMapOvr>
     <a:masterClrMapping/>
   </p:clrMapOvr>
+  <mc:AlternateContent xmlns:mc="http://schemas.openxmlformats.org/markup-compatibility/2006" xmlns:p14="http://schemas.microsoft.com/office/powerpoint/2010/main">
+    <mc:Choice Requires="p14">
+      <p:transition spd="slow" p14:dur="2000" advTm="4964"/>
+    </mc:Choice>
+    <mc:Fallback xmlns="">
+      <p:transition spd="slow" advTm="4964"/>
+    </mc:Fallback>
+  </mc:AlternateContent>
 </p:sld>
 </file>
 
@@ -7525,8 +9539,8 @@
           </a:p>
         </p:txBody>
       </p:sp>
-      <mc:AlternateContent xmlns:mc="http://schemas.openxmlformats.org/markup-compatibility/2006">
-        <mc:Choice xmlns:a14="http://schemas.microsoft.com/office/drawing/2010/main" Requires="a14">
+      <mc:AlternateContent xmlns:mc="http://schemas.openxmlformats.org/markup-compatibility/2006" xmlns:a14="http://schemas.microsoft.com/office/drawing/2010/main">
+        <mc:Choice Requires="a14">
           <p:sp>
             <p:nvSpPr>
               <p:cNvPr id="4" name="文本占位符 3">
@@ -7584,7 +9598,7 @@
             </p:txBody>
           </p:sp>
         </mc:Choice>
-        <mc:Fallback>
+        <mc:Fallback xmlns="">
           <p:sp>
             <p:nvSpPr>
               <p:cNvPr id="4" name="文本占位符 3">
@@ -7607,7 +9621,7 @@
                 <a:ext cx="10333301" cy="365126"/>
               </a:xfrm>
               <a:blipFill>
-                <a:blip r:embed="rId2"/>
+                <a:blip r:embed="rId5"/>
                 <a:stretch>
                   <a:fillRect l="-354" b="-20000"/>
                 </a:stretch>
@@ -7643,7 +9657,7 @@
           <p:nvPr/>
         </p:nvPicPr>
         <p:blipFill>
-          <a:blip r:embed="rId3"/>
+          <a:blip r:embed="rId6"/>
           <a:stretch>
             <a:fillRect/>
           </a:stretch>
@@ -7673,7 +9687,7 @@
           <p:nvPr/>
         </p:nvPicPr>
         <p:blipFill>
-          <a:blip r:embed="rId4"/>
+          <a:blip r:embed="rId7"/>
           <a:stretch>
             <a:fillRect/>
           </a:stretch>
@@ -7698,6 +9712,14 @@
   <p:clrMapOvr>
     <a:masterClrMapping/>
   </p:clrMapOvr>
+  <mc:AlternateContent xmlns:mc="http://schemas.openxmlformats.org/markup-compatibility/2006" xmlns:p14="http://schemas.microsoft.com/office/powerpoint/2010/main">
+    <mc:Choice Requires="p14">
+      <p:transition spd="slow" p14:dur="2000" advTm="52362"/>
+    </mc:Choice>
+    <mc:Fallback xmlns="">
+      <p:transition spd="slow" advTm="52362"/>
+    </mc:Fallback>
+  </mc:AlternateContent>
 </p:sld>
 </file>
 
@@ -7823,6 +9845,14 @@
   <p:clrMapOvr>
     <a:masterClrMapping/>
   </p:clrMapOvr>
+  <mc:AlternateContent xmlns:mc="http://schemas.openxmlformats.org/markup-compatibility/2006" xmlns:p14="http://schemas.microsoft.com/office/powerpoint/2010/main">
+    <mc:Choice Requires="p14">
+      <p:transition spd="slow" p14:dur="2000" advTm="6177"/>
+    </mc:Choice>
+    <mc:Fallback xmlns="">
+      <p:transition spd="slow" advTm="6177"/>
+    </mc:Fallback>
+  </mc:AlternateContent>
 </p:sld>
 </file>
 
@@ -7968,6 +9998,14 @@
   <p:clrMapOvr>
     <a:masterClrMapping/>
   </p:clrMapOvr>
+  <mc:AlternateContent xmlns:mc="http://schemas.openxmlformats.org/markup-compatibility/2006" xmlns:p14="http://schemas.microsoft.com/office/powerpoint/2010/main">
+    <mc:Choice Requires="p14">
+      <p:transition spd="slow" p14:dur="2000" advTm="44585"/>
+    </mc:Choice>
+    <mc:Fallback xmlns="">
+      <p:transition spd="slow" advTm="44585"/>
+    </mc:Fallback>
+  </mc:AlternateContent>
 </p:sld>
 </file>
 
@@ -8093,6 +10131,14 @@
   <p:clrMapOvr>
     <a:masterClrMapping/>
   </p:clrMapOvr>
+  <mc:AlternateContent xmlns:mc="http://schemas.openxmlformats.org/markup-compatibility/2006" xmlns:p14="http://schemas.microsoft.com/office/powerpoint/2010/main">
+    <mc:Choice Requires="p14">
+      <p:transition spd="slow" p14:dur="2000" advTm="3930"/>
+    </mc:Choice>
+    <mc:Fallback xmlns="">
+      <p:transition spd="slow" advTm="3930"/>
+    </mc:Fallback>
+  </mc:AlternateContent>
 </p:sld>
 </file>
 
@@ -8191,6 +10237,14 @@
   <p:clrMapOvr>
     <a:masterClrMapping/>
   </p:clrMapOvr>
+  <mc:AlternateContent xmlns:mc="http://schemas.openxmlformats.org/markup-compatibility/2006" xmlns:p14="http://schemas.microsoft.com/office/powerpoint/2010/main">
+    <mc:Choice Requires="p14">
+      <p:transition spd="slow" p14:dur="2000" advTm="6828"/>
+    </mc:Choice>
+    <mc:Fallback xmlns="">
+      <p:transition spd="slow" advTm="6828"/>
+    </mc:Fallback>
+  </mc:AlternateContent>
 </p:sld>
 </file>
 
@@ -8601,6 +10655,14 @@
   <p:clrMapOvr>
     <a:masterClrMapping/>
   </p:clrMapOvr>
+  <mc:AlternateContent xmlns:mc="http://schemas.openxmlformats.org/markup-compatibility/2006" xmlns:p14="http://schemas.microsoft.com/office/powerpoint/2010/main">
+    <mc:Choice Requires="p14">
+      <p:transition spd="slow" p14:dur="2000" advTm="16073"/>
+    </mc:Choice>
+    <mc:Fallback xmlns="">
+      <p:transition spd="slow" advTm="16073"/>
+    </mc:Fallback>
+  </mc:AlternateContent>
 </p:sld>
 </file>
 
@@ -8938,7 +11000,7 @@
           <p:nvPr/>
         </p:nvPicPr>
         <p:blipFill>
-          <a:blip r:embed="rId2"/>
+          <a:blip r:embed="rId3"/>
           <a:stretch>
             <a:fillRect/>
           </a:stretch>
@@ -8963,6 +11025,14 @@
   <p:clrMapOvr>
     <a:masterClrMapping/>
   </p:clrMapOvr>
+  <mc:AlternateContent xmlns:mc="http://schemas.openxmlformats.org/markup-compatibility/2006" xmlns:p14="http://schemas.microsoft.com/office/powerpoint/2010/main">
+    <mc:Choice Requires="p14">
+      <p:transition spd="slow" p14:dur="2000" advTm="49737"/>
+    </mc:Choice>
+    <mc:Fallback xmlns="">
+      <p:transition spd="slow" advTm="49737"/>
+    </mc:Fallback>
+  </mc:AlternateContent>
 </p:sld>
 </file>
 
@@ -9017,8 +11087,8 @@
           </a:p>
         </p:txBody>
       </p:sp>
-      <mc:AlternateContent xmlns:mc="http://schemas.openxmlformats.org/markup-compatibility/2006">
-        <mc:Choice xmlns:a14="http://schemas.microsoft.com/office/drawing/2010/main" Requires="a14">
+      <mc:AlternateContent xmlns:mc="http://schemas.openxmlformats.org/markup-compatibility/2006" xmlns:a14="http://schemas.microsoft.com/office/drawing/2010/main">
+        <mc:Choice Requires="a14">
           <p:sp>
             <p:nvSpPr>
               <p:cNvPr id="4" name="Content Placeholder 3">
@@ -9101,13 +11171,13 @@
                           <m:t>∪</m:t>
                         </m:r>
                         <m:r>
-                          <a:rPr lang="en-US" altLang="zh-CN" sz="2000" b="1" i="1" kern="100">
+                          <a:rPr lang="en-US" altLang="zh-CN" sz="2000" b="1" i="1" kern="100" smtClean="0">
                             <a:effectLst/>
                             <a:latin typeface="Cambria Math" panose="02040503050406030204" pitchFamily="18" charset="0"/>
                             <a:ea typeface="DengXian" panose="02010600030101010101" pitchFamily="2" charset="-122"/>
                             <a:cs typeface="Times New Roman" panose="02020603050405020304" pitchFamily="18" charset="0"/>
                           </a:rPr>
-                          <m:t>𝑽</m:t>
+                          <m:t>𝑿</m:t>
                         </m:r>
                         <m:r>
                           <a:rPr lang="zh-CN" altLang="zh-CN" sz="2000" kern="100">
@@ -9192,16 +11262,16 @@
                 <a14:m>
                   <m:oMath xmlns:m="http://schemas.openxmlformats.org/officeDocument/2006/math">
                     <m:r>
-                      <a:rPr lang="en-US" altLang="zh-CN" sz="1800" b="0" i="1" smtClean="0">
+                      <a:rPr lang="en-US" altLang="zh-CN" sz="1800" b="1" i="1" smtClean="0">
                         <a:latin typeface="Cambria Math" panose="02040503050406030204" pitchFamily="18" charset="0"/>
                       </a:rPr>
-                      <m:t>𝑈</m:t>
+                      <m:t>𝑼</m:t>
                     </m:r>
                   </m:oMath>
                 </a14:m>
                 <a:r>
                   <a:rPr lang="en-US" altLang="zh-CN" sz="1800" dirty="0"/>
-                  <a:t>: set of observed variables</a:t>
+                  <a:t>: set of hidden binary variables</a:t>
                 </a:r>
               </a:p>
               <a:p>
@@ -9209,16 +11279,16 @@
                 <a14:m>
                   <m:oMath xmlns:m="http://schemas.openxmlformats.org/officeDocument/2006/math">
                     <m:r>
-                      <a:rPr lang="en-US" altLang="zh-CN" sz="1800" b="0" i="1" smtClean="0">
+                      <a:rPr lang="en-US" altLang="zh-CN" sz="1800" b="1" i="1" smtClean="0">
                         <a:latin typeface="Cambria Math" panose="02040503050406030204" pitchFamily="18" charset="0"/>
                       </a:rPr>
-                      <m:t>𝑉</m:t>
+                      <m:t>𝑿</m:t>
                     </m:r>
                   </m:oMath>
                 </a14:m>
                 <a:r>
                   <a:rPr lang="en-US" altLang="zh-CN" sz="1800" dirty="0"/>
-                  <a:t>: set of observed variables</a:t>
+                  <a:t>: set of observed binary variables</a:t>
                 </a:r>
               </a:p>
               <a:p>
@@ -9372,7 +11442,7 @@
             </p:txBody>
           </p:sp>
         </mc:Choice>
-        <mc:Fallback>
+        <mc:Fallback xmlns="">
           <p:sp>
             <p:nvSpPr>
               <p:cNvPr id="4" name="Content Placeholder 3">
@@ -9395,7 +11465,7 @@
                 <a:ext cx="5393100" cy="4213166"/>
               </a:xfrm>
               <a:blipFill>
-                <a:blip r:embed="rId2"/>
+                <a:blip r:embed="rId5"/>
                 <a:stretch>
                   <a:fillRect l="-679" t="-1013"/>
                 </a:stretch>
@@ -9431,7 +11501,7 @@
           <p:nvPr/>
         </p:nvPicPr>
         <p:blipFill>
-          <a:blip r:embed="rId3"/>
+          <a:blip r:embed="rId6"/>
           <a:stretch>
             <a:fillRect/>
           </a:stretch>
@@ -9456,6 +11526,14 @@
   <p:clrMapOvr>
     <a:masterClrMapping/>
   </p:clrMapOvr>
+  <mc:AlternateContent xmlns:mc="http://schemas.openxmlformats.org/markup-compatibility/2006" xmlns:p14="http://schemas.microsoft.com/office/powerpoint/2010/main">
+    <mc:Choice Requires="p14">
+      <p:transition spd="slow" p14:dur="2000" advTm="29878"/>
+    </mc:Choice>
+    <mc:Fallback xmlns="">
+      <p:transition spd="slow" advTm="29878"/>
+    </mc:Fallback>
+  </mc:AlternateContent>
 </p:sld>
 </file>
 
@@ -9510,8 +11588,8 @@
           </a:p>
         </p:txBody>
       </p:sp>
-      <mc:AlternateContent xmlns:mc="http://schemas.openxmlformats.org/markup-compatibility/2006">
-        <mc:Choice xmlns:a14="http://schemas.microsoft.com/office/drawing/2010/main" Requires="a14">
+      <mc:AlternateContent xmlns:mc="http://schemas.openxmlformats.org/markup-compatibility/2006" xmlns:a14="http://schemas.microsoft.com/office/drawing/2010/main">
+        <mc:Choice Requires="a14">
           <p:sp>
             <p:nvSpPr>
               <p:cNvPr id="4" name="Content Placeholder 3">
@@ -9547,7 +11625,9 @@
                 <a14:m>
                   <m:oMath xmlns:m="http://schemas.openxmlformats.org/officeDocument/2006/math">
                     <m:r>
-                      <a:rPr lang="en-US" altLang="zh-CN" sz="2000"/>
+                      <a:rPr lang="en-US" altLang="zh-CN" sz="2000">
+                        <a:latin typeface="Cambria Math" panose="02040503050406030204" pitchFamily="18" charset="0"/>
+                      </a:rPr>
                       <m:t>𝑡</m:t>
                     </m:r>
                   </m:oMath>
@@ -9559,7 +11639,9 @@
                 <a14:m>
                   <m:oMath xmlns:m="http://schemas.openxmlformats.org/officeDocument/2006/math">
                     <m:r>
-                      <a:rPr lang="en-US" altLang="zh-CN" sz="2000"/>
+                      <a:rPr lang="en-US" altLang="zh-CN" sz="2000">
+                        <a:latin typeface="Cambria Math" panose="02040503050406030204" pitchFamily="18" charset="0"/>
+                      </a:rPr>
                       <m:t>𝐾</m:t>
                     </m:r>
                   </m:oMath>
@@ -9573,28 +11655,38 @@
                     <m:sSub>
                       <m:sSubPr>
                         <m:ctrlPr>
-                          <a:rPr lang="zh-CN" altLang="zh-CN" i="1"/>
+                          <a:rPr lang="zh-CN" altLang="zh-CN" i="1">
+                            <a:latin typeface="Cambria Math" panose="02040503050406030204" pitchFamily="18" charset="0"/>
+                          </a:rPr>
                         </m:ctrlPr>
                       </m:sSubPr>
                       <m:e>
                         <m:r>
-                          <a:rPr lang="en-US" altLang="zh-CN" b="1" i="1"/>
+                          <a:rPr lang="en-US" altLang="zh-CN" b="1" i="1">
+                            <a:latin typeface="Cambria Math" panose="02040503050406030204" pitchFamily="18" charset="0"/>
+                          </a:rPr>
                           <m:t>𝑺</m:t>
                         </m:r>
                       </m:e>
                       <m:sub>
                         <m:r>
-                          <a:rPr lang="en-US" altLang="zh-CN" i="1"/>
+                          <a:rPr lang="en-US" altLang="zh-CN" i="1">
+                            <a:latin typeface="Cambria Math" panose="02040503050406030204" pitchFamily="18" charset="0"/>
+                          </a:rPr>
                           <m:t>𝑡</m:t>
                         </m:r>
                       </m:sub>
                     </m:sSub>
                     <m:r>
-                      <a:rPr lang="en-US" altLang="zh-CN"/>
+                      <a:rPr lang="en-US" altLang="zh-CN">
+                        <a:latin typeface="Cambria Math" panose="02040503050406030204" pitchFamily="18" charset="0"/>
+                      </a:rPr>
                       <m:t>⊂</m:t>
                     </m:r>
                     <m:r>
-                      <a:rPr lang="en-US" altLang="zh-CN" b="1" i="1"/>
+                      <a:rPr lang="en-US" altLang="zh-CN" b="1" i="1">
+                        <a:latin typeface="Cambria Math" panose="02040503050406030204" pitchFamily="18" charset="0"/>
+                      </a:rPr>
                       <m:t>𝑿</m:t>
                     </m:r>
                   </m:oMath>
@@ -10332,7 +12424,7 @@
             </p:txBody>
           </p:sp>
         </mc:Choice>
-        <mc:Fallback>
+        <mc:Fallback xmlns="">
           <p:sp>
             <p:nvSpPr>
               <p:cNvPr id="4" name="Content Placeholder 3">
@@ -10355,7 +12447,7 @@
                 <a:ext cx="5393100" cy="4213166"/>
               </a:xfrm>
               <a:blipFill>
-                <a:blip r:embed="rId2"/>
+                <a:blip r:embed="rId5"/>
                 <a:stretch>
                   <a:fillRect l="-679" t="-1592"/>
                 </a:stretch>
@@ -10391,7 +12483,7 @@
           <p:nvPr/>
         </p:nvPicPr>
         <p:blipFill>
-          <a:blip r:embed="rId3"/>
+          <a:blip r:embed="rId6"/>
           <a:stretch>
             <a:fillRect/>
           </a:stretch>
@@ -10416,6 +12508,14 @@
   <p:clrMapOvr>
     <a:masterClrMapping/>
   </p:clrMapOvr>
+  <mc:AlternateContent xmlns:mc="http://schemas.openxmlformats.org/markup-compatibility/2006" xmlns:p14="http://schemas.microsoft.com/office/powerpoint/2010/main">
+    <mc:Choice Requires="p14">
+      <p:transition spd="slow" p14:dur="2000" advTm="33622"/>
+    </mc:Choice>
+    <mc:Fallback xmlns="">
+      <p:transition spd="slow" advTm="33622"/>
+    </mc:Fallback>
+  </mc:AlternateContent>
 </p:sld>
 </file>
 
@@ -10485,7 +12585,7 @@
           <p:nvPr/>
         </p:nvPicPr>
         <p:blipFill>
-          <a:blip r:embed="rId2">
+          <a:blip r:embed="rId3">
             <a:extLst>
               <a:ext uri="{28A0092B-C50C-407E-A947-70E740481C1C}">
                 <a14:useLocalDpi xmlns:a14="http://schemas.microsoft.com/office/drawing/2010/main" val="0"/>
@@ -10532,7 +12632,7 @@
           <p:nvPr/>
         </p:nvPicPr>
         <p:blipFill>
-          <a:blip r:embed="rId3">
+          <a:blip r:embed="rId4">
             <a:extLst>
               <a:ext uri="{28A0092B-C50C-407E-A947-70E740481C1C}">
                 <a14:useLocalDpi xmlns:a14="http://schemas.microsoft.com/office/drawing/2010/main" val="0"/>
@@ -10664,6 +12764,14 @@
   <p:clrMapOvr>
     <a:masterClrMapping/>
   </p:clrMapOvr>
+  <mc:AlternateContent xmlns:mc="http://schemas.openxmlformats.org/markup-compatibility/2006" xmlns:p14="http://schemas.microsoft.com/office/powerpoint/2010/main">
+    <mc:Choice Requires="p14">
+      <p:transition spd="slow" p14:dur="2000" advTm="30372"/>
+    </mc:Choice>
+    <mc:Fallback xmlns="">
+      <p:transition spd="slow" advTm="30372"/>
+    </mc:Fallback>
+  </mc:AlternateContent>
 </p:sld>
 </file>
 
@@ -10789,6 +12897,14 @@
   <p:clrMapOvr>
     <a:masterClrMapping/>
   </p:clrMapOvr>
+  <mc:AlternateContent xmlns:mc="http://schemas.openxmlformats.org/markup-compatibility/2006" xmlns:p14="http://schemas.microsoft.com/office/powerpoint/2010/main">
+    <mc:Choice Requires="p14">
+      <p:transition spd="slow" p14:dur="2000" advTm="8719"/>
+    </mc:Choice>
+    <mc:Fallback xmlns="">
+      <p:transition spd="slow" advTm="8719"/>
+    </mc:Fallback>
+  </mc:AlternateContent>
 </p:sld>
 </file>
 
@@ -10843,8 +12959,8 @@
           </a:p>
         </p:txBody>
       </p:sp>
-      <mc:AlternateContent xmlns:mc="http://schemas.openxmlformats.org/markup-compatibility/2006">
-        <mc:Choice xmlns:a14="http://schemas.microsoft.com/office/drawing/2010/main" Requires="a14">
+      <mc:AlternateContent xmlns:mc="http://schemas.openxmlformats.org/markup-compatibility/2006" xmlns:a14="http://schemas.microsoft.com/office/drawing/2010/main">
+        <mc:Choice Requires="a14">
           <p:sp>
             <p:nvSpPr>
               <p:cNvPr id="2" name="Content Placeholder 3">
@@ -11481,7 +13597,7 @@
             </p:txBody>
           </p:sp>
         </mc:Choice>
-        <mc:Fallback>
+        <mc:Fallback xmlns="">
           <p:sp>
             <p:nvSpPr>
               <p:cNvPr id="2" name="Content Placeholder 3">
@@ -11504,7 +13620,7 @@
                 <a:ext cx="5393100" cy="4213166"/>
               </a:xfrm>
               <a:blipFill>
-                <a:blip r:embed="rId2"/>
+                <a:blip r:embed="rId5"/>
                 <a:stretch>
                   <a:fillRect l="-566" t="-2171" r="-1131"/>
                 </a:stretch>
@@ -11540,7 +13656,7 @@
           <p:nvPr/>
         </p:nvPicPr>
         <p:blipFill>
-          <a:blip r:embed="rId3"/>
+          <a:blip r:embed="rId6"/>
           <a:stretch>
             <a:fillRect/>
           </a:stretch>
@@ -11565,6 +13681,14 @@
   <p:clrMapOvr>
     <a:masterClrMapping/>
   </p:clrMapOvr>
+  <mc:AlternateContent xmlns:mc="http://schemas.openxmlformats.org/markup-compatibility/2006" xmlns:p14="http://schemas.microsoft.com/office/powerpoint/2010/main">
+    <mc:Choice Requires="p14">
+      <p:transition spd="slow" p14:dur="2000" advTm="67608"/>
+    </mc:Choice>
+    <mc:Fallback xmlns="">
+      <p:transition spd="slow" advTm="67608"/>
+    </mc:Fallback>
+  </mc:AlternateContent>
 </p:sld>
 </file>
 
